--- a/slides/Mandadi_Khalsa_Presentation1.pptx
+++ b/slides/Mandadi_Khalsa_Presentation1.pptx
@@ -4868,7 +4868,23 @@
                 </a:solidFill>
                 <a:latin typeface="Avenir Next"/>
               </a:rPr>
-              <a:t>Copper against its own expected range. The expected line uses only data from before the tariff.</a:t>
+              <a:t>Copper against its own expected range.</a:t>
+            </a:r>
+          </a:p>
+          <a:p>
+            <a:pPr algn="l">
+              <a:lnSpc>
+                <a:spcPct val="112000"/>
+              </a:lnSpc>
+            </a:pPr>
+            <a:r>
+              <a:rPr sz="1700" b="0" i="0">
+                <a:solidFill>
+                  <a:srgbClr val="6E737C"/>
+                </a:solidFill>
+                <a:latin typeface="Avenir Next"/>
+              </a:rPr>
+              <a:t>The expected line uses only data from before the tariff.</a:t>
             </a:r>
           </a:p>
         </p:txBody>
@@ -5870,7 +5886,7 @@
                 </a:solidFill>
                 <a:latin typeface="Avenir Next"/>
               </a:rPr>
-              <a:t>One row is one product, one country, one month.</a:t>
+              <a:t>One row: one product, one country, one month.</a:t>
             </a:r>
           </a:p>
         </p:txBody>
@@ -7243,7 +7259,23 @@
                 </a:solidFill>
                 <a:latin typeface="Avenir Next"/>
               </a:rPr>
-              <a:t>2,792 Federal Register documents reviewed, 134 are real tariff actions. Median gap from announcement to start date is 8 days.</a:t>
+              <a:t>2,792 Federal Register documents reviewed, 134 are real tariff actions.</a:t>
+            </a:r>
+          </a:p>
+          <a:p>
+            <a:pPr algn="l">
+              <a:lnSpc>
+                <a:spcPct val="112000"/>
+              </a:lnSpc>
+            </a:pPr>
+            <a:r>
+              <a:rPr sz="1700" b="0" i="0">
+                <a:solidFill>
+                  <a:srgbClr val="6E737C"/>
+                </a:solidFill>
+                <a:latin typeface="Avenir Next"/>
+              </a:rPr>
+              <a:t>Median gap from announcement to start date is 8 days.</a:t>
             </a:r>
           </a:p>
         </p:txBody>

--- a/slides/Mandadi_Khalsa_Presentation1.pptx
+++ b/slides/Mandadi_Khalsa_Presentation1.pptx
@@ -5335,6 +5335,22 @@
                 </a:solidFill>
                 <a:latin typeface="Avenir Next"/>
               </a:rPr>
+              <a:t>Importers, lenders and carriers all decide here.</a:t>
+            </a:r>
+          </a:p>
+          <a:p>
+            <a:pPr algn="l">
+              <a:lnSpc>
+                <a:spcPct val="112000"/>
+              </a:lnSpc>
+            </a:pPr>
+            <a:r>
+              <a:rPr sz="1700" b="0" i="0">
+                <a:solidFill>
+                  <a:srgbClr val="6E737C"/>
+                </a:solidFill>
+                <a:latin typeface="Avenir Next"/>
+              </a:rPr>
               <a:t>Census publishes monthly trade about five weeks after the month closes.</a:t>
             </a:r>
           </a:p>
@@ -5583,7 +5599,7 @@
                 </a:solidFill>
                 <a:latin typeface="Avenir Next"/>
               </a:rPr>
-              <a:t>Before the duty starts, do imports jump, and by how much?</a:t>
+              <a:t>classification, then regression</a:t>
             </a:r>
           </a:p>
         </p:txBody>
@@ -5661,9 +5677,32 @@
                 </a:solidFill>
                 <a:latin typeface="Avenir Next"/>
               </a:rPr>
-              <a:t>Is the drop volume borrowed from later months, a real fall in demand,</a:t>
-            </a:r>
-          </a:p>
+              <a:t>three-way classification: borrowed, lost, or relocated</a:t>
+            </a:r>
+          </a:p>
+        </p:txBody>
+      </p:sp>
+      <p:sp>
+        <p:nvSpPr>
+          <p:cNvPr id="10" name="TextBox 9"/>
+          <p:cNvSpPr txBox="1"/>
+          <p:nvPr/>
+        </p:nvSpPr>
+        <p:spPr>
+          <a:xfrm>
+            <a:off x="822960" y="3749039"/>
+            <a:ext cx="10360152" cy="731520"/>
+          </a:xfrm>
+          <a:prstGeom prst="rect">
+            <a:avLst/>
+          </a:prstGeom>
+          <a:noFill/>
+        </p:spPr>
+        <p:txBody>
+          <a:bodyPr wrap="square">
+            <a:spAutoFit/>
+          </a:bodyPr>
+          <a:lstStyle/>
           <a:p>
             <a:pPr algn="l">
               <a:lnSpc>
@@ -5671,26 +5710,26 @@
               </a:lnSpc>
             </a:pPr>
             <a:r>
-              <a:rPr sz="2000" b="0" i="0">
-                <a:solidFill>
-                  <a:srgbClr val="6E737C"/>
+              <a:rPr sz="2000" b="1" i="0">
+                <a:solidFill>
+                  <a:srgbClr val="14161A"/>
                 </a:solidFill>
                 <a:latin typeface="Avenir Next"/>
               </a:rPr>
-              <a:t>or trade moving to another country?</a:t>
-            </a:r>
-          </a:p>
-        </p:txBody>
-      </p:sp>
-      <p:sp>
-        <p:nvSpPr>
-          <p:cNvPr id="10" name="TextBox 9"/>
+              <a:t>3.  How long does it last?</a:t>
+            </a:r>
+          </a:p>
+        </p:txBody>
+      </p:sp>
+      <p:sp>
+        <p:nvSpPr>
+          <p:cNvPr id="11" name="TextBox 10"/>
           <p:cNvSpPr txBox="1"/>
           <p:nvPr/>
         </p:nvSpPr>
         <p:spPr>
           <a:xfrm>
-            <a:off x="822960" y="4041648"/>
+            <a:off x="822960" y="4206240"/>
             <a:ext cx="10360152" cy="731520"/>
           </a:xfrm>
           <a:prstGeom prst="rect">
@@ -5710,52 +5749,13 @@
               </a:lnSpc>
             </a:pPr>
             <a:r>
-              <a:rPr sz="2000" b="1" i="0">
-                <a:solidFill>
-                  <a:srgbClr val="14161A"/>
+              <a:rPr sz="2000" b="0" i="0">
+                <a:solidFill>
+                  <a:srgbClr val="6E737C"/>
                 </a:solidFill>
                 <a:latin typeface="Avenir Next"/>
               </a:rPr>
-              <a:t>3.  How long does it last?</a:t>
-            </a:r>
-          </a:p>
-        </p:txBody>
-      </p:sp>
-      <p:sp>
-        <p:nvSpPr>
-          <p:cNvPr id="11" name="TextBox 10"/>
-          <p:cNvSpPr txBox="1"/>
-          <p:nvPr/>
-        </p:nvSpPr>
-        <p:spPr>
-          <a:xfrm>
-            <a:off x="822960" y="4498848"/>
-            <a:ext cx="10360152" cy="731520"/>
-          </a:xfrm>
-          <a:prstGeom prst="rect">
-            <a:avLst/>
-          </a:prstGeom>
-          <a:noFill/>
-        </p:spPr>
-        <p:txBody>
-          <a:bodyPr wrap="square">
-            <a:spAutoFit/>
-          </a:bodyPr>
-          <a:lstStyle/>
-          <a:p>
-            <a:pPr algn="l">
-              <a:lnSpc>
-                <a:spcPct val="115000"/>
-              </a:lnSpc>
-            </a:pPr>
-            <a:r>
-              <a:rPr sz="2000" b="0" i="0">
-                <a:solidFill>
-                  <a:srgbClr val="6E737C"/>
-                </a:solidFill>
-                <a:latin typeface="Avenir Next"/>
-              </a:rPr>
-              <a:t>Months, or permanently?</a:t>
+              <a:t>duration, with censoring</a:t>
             </a:r>
           </a:p>
         </p:txBody>
@@ -6207,6 +6207,61 @@
         </p:nvSpPr>
         <p:spPr>
           <a:xfrm>
+            <a:off x="7040880" y="5138928"/>
+            <a:ext cx="4462272" cy="731520"/>
+          </a:xfrm>
+          <a:prstGeom prst="rect">
+            <a:avLst/>
+          </a:prstGeom>
+          <a:noFill/>
+        </p:spPr>
+        <p:txBody>
+          <a:bodyPr wrap="square">
+            <a:spAutoFit/>
+          </a:bodyPr>
+          <a:lstStyle/>
+          <a:p>
+            <a:pPr algn="l">
+              <a:lnSpc>
+                <a:spcPct val="125000"/>
+              </a:lnSpc>
+            </a:pPr>
+            <a:r>
+              <a:rPr sz="1200" b="1" i="0">
+                <a:solidFill>
+                  <a:srgbClr val="14161A"/>
+                </a:solidFill>
+                <a:latin typeface="Avenir Next"/>
+              </a:rPr>
+              <a:t>Census trade API  +  Federal Register API</a:t>
+            </a:r>
+          </a:p>
+          <a:p>
+            <a:pPr algn="l">
+              <a:lnSpc>
+                <a:spcPct val="125000"/>
+              </a:lnSpc>
+            </a:pPr>
+            <a:r>
+              <a:rPr sz="1200" b="1" i="0">
+                <a:solidFill>
+                  <a:srgbClr val="14161A"/>
+                </a:solidFill>
+                <a:latin typeface="Avenir Next"/>
+              </a:rPr>
+              <a:t>2,792 documents, 134 real tariff actions</a:t>
+            </a:r>
+          </a:p>
+        </p:txBody>
+      </p:sp>
+      <p:sp>
+        <p:nvSpPr>
+          <p:cNvPr id="11" name="TextBox 10"/>
+          <p:cNvSpPr txBox="1"/>
+          <p:nvPr/>
+        </p:nvSpPr>
+        <p:spPr>
+          <a:xfrm>
             <a:off x="685800" y="5897880"/>
             <a:ext cx="10817352" cy="822960"/>
           </a:xfrm>
@@ -6846,9 +6901,32 @@
                 </a:solidFill>
                 <a:latin typeface="Avenir Next"/>
               </a:rPr>
-              <a:t>140 months of imports at the exact level tariffs are written, reconciled</a:t>
-            </a:r>
-          </a:p>
+              <a:t>140 months at the level tariffs are written, reconciled against published totals.</a:t>
+            </a:r>
+          </a:p>
+        </p:txBody>
+      </p:sp>
+      <p:sp>
+        <p:nvSpPr>
+          <p:cNvPr id="7" name="TextBox 6"/>
+          <p:cNvSpPr txBox="1"/>
+          <p:nvPr/>
+        </p:nvSpPr>
+        <p:spPr>
+          <a:xfrm>
+            <a:off x="822960" y="2834640"/>
+            <a:ext cx="10360152" cy="731520"/>
+          </a:xfrm>
+          <a:prstGeom prst="rect">
+            <a:avLst/>
+          </a:prstGeom>
+          <a:noFill/>
+        </p:spPr>
+        <p:txBody>
+          <a:bodyPr wrap="square">
+            <a:spAutoFit/>
+          </a:bodyPr>
+          <a:lstStyle/>
           <a:p>
             <a:pPr algn="l">
               <a:lnSpc>
@@ -6856,26 +6934,26 @@
               </a:lnSpc>
             </a:pPr>
             <a:r>
-              <a:rPr sz="1700" b="0" i="0">
-                <a:solidFill>
-                  <a:srgbClr val="6E737C"/>
+              <a:rPr sz="1700" b="1" i="0">
+                <a:solidFill>
+                  <a:srgbClr val="14161A"/>
                 </a:solidFill>
                 <a:latin typeface="Avenir Next"/>
               </a:rPr>
-              <a:t>against published totals.</a:t>
-            </a:r>
-          </a:p>
-        </p:txBody>
-      </p:sp>
-      <p:sp>
-        <p:nvSpPr>
-          <p:cNvPr id="7" name="TextBox 6"/>
+              <a:t>A detector, and its limits</a:t>
+            </a:r>
+          </a:p>
+        </p:txBody>
+      </p:sp>
+      <p:sp>
+        <p:nvSpPr>
+          <p:cNvPr id="8" name="TextBox 7"/>
           <p:cNvSpPr txBox="1"/>
           <p:nvPr/>
         </p:nvSpPr>
         <p:spPr>
           <a:xfrm>
-            <a:off x="822960" y="3127248"/>
+            <a:off x="822960" y="3291840"/>
             <a:ext cx="10360152" cy="731520"/>
           </a:xfrm>
           <a:prstGeom prst="rect">
@@ -6895,26 +6973,26 @@
               </a:lnSpc>
             </a:pPr>
             <a:r>
-              <a:rPr sz="1700" b="1" i="0">
-                <a:solidFill>
-                  <a:srgbClr val="14161A"/>
+              <a:rPr sz="1700" b="0" i="0">
+                <a:solidFill>
+                  <a:srgbClr val="6E737C"/>
                 </a:solidFill>
                 <a:latin typeface="Avenir Next"/>
               </a:rPr>
-              <a:t>A detector, and its limits</a:t>
-            </a:r>
-          </a:p>
-        </p:txBody>
-      </p:sp>
-      <p:sp>
-        <p:nvSpPr>
-          <p:cNvPr id="8" name="TextBox 7"/>
+              <a:t>It finds unusual months. It cannot tell a tariff from a price shock.</a:t>
+            </a:r>
+          </a:p>
+        </p:txBody>
+      </p:sp>
+      <p:sp>
+        <p:nvSpPr>
+          <p:cNvPr id="9" name="TextBox 8"/>
           <p:cNvSpPr txBox="1"/>
           <p:nvPr/>
         </p:nvSpPr>
         <p:spPr>
           <a:xfrm>
-            <a:off x="822960" y="3584448"/>
+            <a:off x="822960" y="3749039"/>
             <a:ext cx="10360152" cy="731520"/>
           </a:xfrm>
           <a:prstGeom prst="rect">
@@ -6934,15 +7012,38 @@
               </a:lnSpc>
             </a:pPr>
             <a:r>
-              <a:rPr sz="1700" b="0" i="0">
-                <a:solidFill>
-                  <a:srgbClr val="6E737C"/>
+              <a:rPr sz="1700" b="1" i="0">
+                <a:solidFill>
+                  <a:srgbClr val="14161A"/>
                 </a:solidFill>
                 <a:latin typeface="Avenir Next"/>
               </a:rPr>
-              <a:t>We can find months that are unusual for a product, and we know it cannot</a:t>
-            </a:r>
-          </a:p>
+              <a:t>134 tariff actions, with the products behind each one</a:t>
+            </a:r>
+          </a:p>
+        </p:txBody>
+      </p:sp>
+      <p:sp>
+        <p:nvSpPr>
+          <p:cNvPr id="10" name="TextBox 9"/>
+          <p:cNvSpPr txBox="1"/>
+          <p:nvPr/>
+        </p:nvSpPr>
+        <p:spPr>
+          <a:xfrm>
+            <a:off x="822960" y="4206240"/>
+            <a:ext cx="10360152" cy="731520"/>
+          </a:xfrm>
+          <a:prstGeom prst="rect">
+            <a:avLst/>
+          </a:prstGeom>
+          <a:noFill/>
+        </p:spPr>
+        <p:txBody>
+          <a:bodyPr wrap="square">
+            <a:spAutoFit/>
+          </a:bodyPr>
+          <a:lstStyle/>
           <a:p>
             <a:pPr algn="l">
               <a:lnSpc>
@@ -6956,20 +7057,20 @@
                 </a:solidFill>
                 <a:latin typeface="Avenir Next"/>
               </a:rPr>
-              <a:t>tell a tariff from a price shock on its own.</a:t>
-            </a:r>
-          </a:p>
-        </p:txBody>
-      </p:sp>
-      <p:sp>
-        <p:nvSpPr>
-          <p:cNvPr id="9" name="TextBox 8"/>
+              <a:t>Corrected dates, and the 8-digit product lists.</a:t>
+            </a:r>
+          </a:p>
+        </p:txBody>
+      </p:sp>
+      <p:sp>
+        <p:nvSpPr>
+          <p:cNvPr id="11" name="TextBox 10"/>
           <p:cNvSpPr txBox="1"/>
           <p:nvPr/>
         </p:nvSpPr>
         <p:spPr>
           <a:xfrm>
-            <a:off x="822960" y="4334256"/>
+            <a:off x="822960" y="4663440"/>
             <a:ext cx="10360152" cy="731520"/>
           </a:xfrm>
           <a:prstGeom prst="rect">
@@ -6995,20 +7096,20 @@
                 </a:solidFill>
                 <a:latin typeface="Avenir Next"/>
               </a:rPr>
-              <a:t>134 tariff actions, with the products behind each one</a:t>
-            </a:r>
-          </a:p>
-        </p:txBody>
-      </p:sp>
-      <p:sp>
-        <p:nvSpPr>
-          <p:cNvPr id="10" name="TextBox 9"/>
+              <a:t>How we will measure it</a:t>
+            </a:r>
+          </a:p>
+        </p:txBody>
+      </p:sp>
+      <p:sp>
+        <p:nvSpPr>
+          <p:cNvPr id="12" name="TextBox 11"/>
           <p:cNvSpPr txBox="1"/>
           <p:nvPr/>
         </p:nvSpPr>
         <p:spPr>
           <a:xfrm>
-            <a:off x="822960" y="4791456"/>
+            <a:off x="822960" y="5120640"/>
             <a:ext cx="10360152" cy="731520"/>
           </a:xfrm>
           <a:prstGeom prst="rect">
@@ -7034,20 +7135,20 @@
                 </a:solidFill>
                 <a:latin typeface="Avenir Next"/>
               </a:rPr>
-              <a:t>Corrected announcement and effective dates, and the 8-digit product lists.</a:t>
-            </a:r>
-          </a:p>
-        </p:txBody>
-      </p:sp>
-      <p:sp>
-        <p:nvSpPr>
-          <p:cNvPr id="11" name="TextBox 10"/>
+              <a:t>Within product, across origins.</a:t>
+            </a:r>
+          </a:p>
+        </p:txBody>
+      </p:sp>
+      <p:sp>
+        <p:nvSpPr>
+          <p:cNvPr id="13" name="TextBox 12"/>
           <p:cNvSpPr txBox="1"/>
           <p:nvPr/>
         </p:nvSpPr>
         <p:spPr>
           <a:xfrm>
-            <a:off x="822960" y="5248656"/>
+            <a:off x="822960" y="5577840"/>
             <a:ext cx="10360152" cy="731520"/>
           </a:xfrm>
           <a:prstGeom prst="rect">
@@ -7073,20 +7174,20 @@
                 </a:solidFill>
                 <a:latin typeface="Avenir Next"/>
               </a:rPr>
-              <a:t>Next</a:t>
-            </a:r>
-          </a:p>
-        </p:txBody>
-      </p:sp>
-      <p:sp>
-        <p:nvSpPr>
-          <p:cNvPr id="12" name="TextBox 11"/>
+              <a:t>How we will know it is real</a:t>
+            </a:r>
+          </a:p>
+        </p:txBody>
+      </p:sp>
+      <p:sp>
+        <p:nvSpPr>
+          <p:cNvPr id="14" name="TextBox 13"/>
           <p:cNvSpPr txBox="1"/>
           <p:nvPr/>
         </p:nvSpPr>
         <p:spPr>
           <a:xfrm>
-            <a:off x="822960" y="5705856"/>
+            <a:off x="822960" y="6035040"/>
             <a:ext cx="10360152" cy="731520"/>
           </a:xfrm>
           <a:prstGeom prst="rect">
@@ -7112,23 +7213,7 @@
                 </a:solidFill>
                 <a:latin typeface="Avenir Next"/>
               </a:rPr>
-              <a:t>Measure the rush and what follows it, at product level, using untreated</a:t>
-            </a:r>
-          </a:p>
-          <a:p>
-            <a:pPr algn="l">
-              <a:lnSpc>
-                <a:spcPct val="115000"/>
-              </a:lnSpc>
-            </a:pPr>
-            <a:r>
-              <a:rPr sz="1700" b="0" i="0">
-                <a:solidFill>
-                  <a:srgbClr val="6E737C"/>
-                </a:solidFill>
-                <a:latin typeface="Avenir Next"/>
-              </a:rPr>
-              <a:t>countries as the comparison.</a:t>
+              <a:t>Every estimate against a placebo. Three methods have already failed it.</a:t>
             </a:r>
           </a:p>
         </p:txBody>

--- a/slides/Mandadi_Khalsa_Presentation1.pptx
+++ b/slides/Mandadi_Khalsa_Presentation1.pptx
@@ -4931,23 +4931,7 @@
                 </a:solidFill>
                 <a:latin typeface="Avenir Next"/>
               </a:rPr>
-              <a:t>Copper against its own expected range.</a:t>
-            </a:r>
-          </a:p>
-          <a:p>
-            <a:pPr algn="l">
-              <a:lnSpc>
-                <a:spcPct val="112000"/>
-              </a:lnSpc>
-            </a:pPr>
-            <a:r>
-              <a:rPr sz="1700" b="0" i="0">
-                <a:solidFill>
-                  <a:srgbClr val="6E737C"/>
-                </a:solidFill>
-                <a:latin typeface="Avenir Next"/>
-              </a:rPr>
-              <a:t>The expected line uses only data from before the tariff.</a:t>
+              <a:t>Fig. 7   Copper against its own expected range, built only from data before the tariff.</a:t>
             </a:r>
           </a:p>
         </p:txBody>
@@ -5141,7 +5125,23 @@
                 </a:solidFill>
                 <a:latin typeface="Avenir Next"/>
               </a:rPr>
-              <a:t>A duty is announced, then starts later. That gap is a window to import before it applies.</a:t>
+              <a:t>Fig. 1   Copper imports. A duty is announced, then starts later.</a:t>
+            </a:r>
+          </a:p>
+          <a:p>
+            <a:pPr algn="l">
+              <a:lnSpc>
+                <a:spcPct val="112000"/>
+              </a:lnSpc>
+            </a:pPr>
+            <a:r>
+              <a:rPr sz="1700" b="0" i="0">
+                <a:solidFill>
+                  <a:srgbClr val="6E737C"/>
+                </a:solidFill>
+                <a:latin typeface="Avenir Next"/>
+              </a:rPr>
+              <a:t>That gap is a window to import before it applies.</a:t>
             </a:r>
           </a:p>
         </p:txBody>
@@ -5335,7 +5335,7 @@
                 </a:solidFill>
                 <a:latin typeface="Avenir Next"/>
               </a:rPr>
-              <a:t>Importers, lenders and carriers all decide here.</a:t>
+              <a:t>Fig. 2   Importers, lenders and carriers all decide here.</a:t>
             </a:r>
           </a:p>
           <a:p>
@@ -5949,7 +5949,7 @@
                 </a:solidFill>
                 <a:latin typeface="Avenir Next"/>
               </a:rPr>
-              <a:t>One row: one product, one country, one month.</a:t>
+              <a:t>Table 1   One product, one country, one month.</a:t>
             </a:r>
           </a:p>
         </p:txBody>
@@ -6288,7 +6288,7 @@
                 </a:solidFill>
                 <a:latin typeface="Avenir Next"/>
               </a:rPr>
-              <a:t>2017 adds up to 2,340 billion dollars against a published 2.34 trillion, and all 140 months</a:t>
+              <a:t>Fig. 3   2017 adds up to 2,340 billion dollars against a published 2.34 trillion, and all</a:t>
             </a:r>
           </a:p>
           <a:p>
@@ -6304,7 +6304,7 @@
                 </a:solidFill>
                 <a:latin typeface="Avenir Next"/>
               </a:rPr>
-              <a:t>reconcile against a separate total the API returns on its own.</a:t>
+              <a:t>140 months reconcile against a separate total the API returns on its own.</a:t>
             </a:r>
           </a:p>
         </p:txBody>
@@ -6498,7 +6498,7 @@
                 </a:solidFill>
                 <a:latin typeface="Avenir Next"/>
               </a:rPr>
-              <a:t>Each chapter measured against its own normal range, built only from data before 2025.</a:t>
+              <a:t>Fig. 4   Each chapter measured against its own normal range, built only from data before 2025.</a:t>
             </a:r>
           </a:p>
         </p:txBody>
@@ -6692,7 +6692,7 @@
                 </a:solidFill>
                 <a:latin typeface="Avenir Next"/>
               </a:rPr>
-              <a:t>The typical tariff action covers about 5% of its chapter's value. A third cover under 1%.</a:t>
+              <a:t>Fig. 5   The typical tariff action covers about 5% of its chapter's value. A third cover under 1%.</a:t>
             </a:r>
           </a:p>
         </p:txBody>
@@ -6836,6 +6836,61 @@
         </p:nvSpPr>
         <p:spPr>
           <a:xfrm>
+            <a:off x="685800" y="5897880"/>
+            <a:ext cx="10817352" cy="685800"/>
+          </a:xfrm>
+          <a:prstGeom prst="rect">
+            <a:avLst/>
+          </a:prstGeom>
+          <a:noFill/>
+        </p:spPr>
+        <p:txBody>
+          <a:bodyPr wrap="square">
+            <a:spAutoFit/>
+          </a:bodyPr>
+          <a:lstStyle/>
+          <a:p>
+            <a:pPr algn="l">
+              <a:lnSpc>
+                <a:spcPct val="112000"/>
+              </a:lnSpc>
+            </a:pPr>
+            <a:r>
+              <a:rPr sz="1700" b="0" i="0">
+                <a:solidFill>
+                  <a:srgbClr val="6E737C"/>
+                </a:solidFill>
+                <a:latin typeface="Avenir Next"/>
+              </a:rPr>
+              <a:t>Take-away for anyone working with this data: do not measure tariff effects at chapter level.</a:t>
+            </a:r>
+          </a:p>
+          <a:p>
+            <a:pPr algn="l">
+              <a:lnSpc>
+                <a:spcPct val="112000"/>
+              </a:lnSpc>
+            </a:pPr>
+            <a:r>
+              <a:rPr sz="1700" b="0" i="0">
+                <a:solidFill>
+                  <a:srgbClr val="6E737C"/>
+                </a:solidFill>
+                <a:latin typeface="Avenir Next"/>
+              </a:rPr>
+              <a:t>The typical action touches 5% of a chapter, so a real effect averages away to nothing.</a:t>
+            </a:r>
+          </a:p>
+        </p:txBody>
+      </p:sp>
+      <p:sp>
+        <p:nvSpPr>
+          <p:cNvPr id="6" name="TextBox 5"/>
+          <p:cNvSpPr txBox="1"/>
+          <p:nvPr/>
+        </p:nvSpPr>
+        <p:spPr>
+          <a:xfrm>
             <a:off x="822960" y="1920240"/>
             <a:ext cx="10360152" cy="731520"/>
           </a:xfrm>
@@ -6869,7 +6924,7 @@
       </p:sp>
       <p:sp>
         <p:nvSpPr>
-          <p:cNvPr id="6" name="TextBox 5"/>
+          <p:cNvPr id="7" name="TextBox 6"/>
           <p:cNvSpPr txBox="1"/>
           <p:nvPr/>
         </p:nvSpPr>
@@ -6908,7 +6963,7 @@
       </p:sp>
       <p:sp>
         <p:nvSpPr>
-          <p:cNvPr id="7" name="TextBox 6"/>
+          <p:cNvPr id="8" name="TextBox 7"/>
           <p:cNvSpPr txBox="1"/>
           <p:nvPr/>
         </p:nvSpPr>
@@ -6947,7 +7002,7 @@
       </p:sp>
       <p:sp>
         <p:nvSpPr>
-          <p:cNvPr id="8" name="TextBox 7"/>
+          <p:cNvPr id="9" name="TextBox 8"/>
           <p:cNvSpPr txBox="1"/>
           <p:nvPr/>
         </p:nvSpPr>
@@ -6986,7 +7041,7 @@
       </p:sp>
       <p:sp>
         <p:nvSpPr>
-          <p:cNvPr id="9" name="TextBox 8"/>
+          <p:cNvPr id="10" name="TextBox 9"/>
           <p:cNvSpPr txBox="1"/>
           <p:nvPr/>
         </p:nvSpPr>
@@ -7025,7 +7080,7 @@
       </p:sp>
       <p:sp>
         <p:nvSpPr>
-          <p:cNvPr id="10" name="TextBox 9"/>
+          <p:cNvPr id="11" name="TextBox 10"/>
           <p:cNvSpPr txBox="1"/>
           <p:nvPr/>
         </p:nvSpPr>
@@ -7064,7 +7119,7 @@
       </p:sp>
       <p:sp>
         <p:nvSpPr>
-          <p:cNvPr id="11" name="TextBox 10"/>
+          <p:cNvPr id="12" name="TextBox 11"/>
           <p:cNvSpPr txBox="1"/>
           <p:nvPr/>
         </p:nvSpPr>
@@ -7103,7 +7158,7 @@
       </p:sp>
       <p:sp>
         <p:nvSpPr>
-          <p:cNvPr id="12" name="TextBox 11"/>
+          <p:cNvPr id="13" name="TextBox 12"/>
           <p:cNvSpPr txBox="1"/>
           <p:nvPr/>
         </p:nvSpPr>
@@ -7142,7 +7197,7 @@
       </p:sp>
       <p:sp>
         <p:nvSpPr>
-          <p:cNvPr id="13" name="TextBox 12"/>
+          <p:cNvPr id="14" name="TextBox 13"/>
           <p:cNvSpPr txBox="1"/>
           <p:nvPr/>
         </p:nvSpPr>
@@ -7181,7 +7236,7 @@
       </p:sp>
       <p:sp>
         <p:nvSpPr>
-          <p:cNvPr id="14" name="TextBox 13"/>
+          <p:cNvPr id="15" name="TextBox 14"/>
           <p:cNvSpPr txBox="1"/>
           <p:nvPr/>
         </p:nvSpPr>
@@ -7407,7 +7462,7 @@
                 </a:solidFill>
                 <a:latin typeface="Avenir Next"/>
               </a:rPr>
-              <a:t>2,792 Federal Register documents reviewed, 134 are real tariff actions.</a:t>
+              <a:t>Fig. 6   2,792 Federal Register documents reviewed, 134 are real tariff actions.</a:t>
             </a:r>
           </a:p>
           <a:p>

--- a/slides/Mandadi_Khalsa_Presentation1.pptx
+++ b/slides/Mandadi_Khalsa_Presentation1.pptx
@@ -15,6 +15,7 @@
     <p:sldId id="263" r:id="rId15"/>
     <p:sldId id="264" r:id="rId16"/>
     <p:sldId id="265" r:id="rId17"/>
+    <p:sldId id="266" r:id="rId18"/>
   </p:sldIdLst>
   <p:sldSz cx="12191695" cy="6858000" type="screen4x3"/>
   <p:notesSz cx="6858000" cy="9144000"/>
@@ -657,6 +658,100 @@
           <a:p>
             <a:r>
               <a:t>Aluminium does NOT clear: it peaks at 26% against a band of 100%, because its own history is volatile. Same tariff year, and the test says no. A test that can say no is the only kind worth having.</a:t>
+            </a:r>
+          </a:p>
+        </p:txBody>
+      </p:sp>
+      <p:sp>
+        <p:nvSpPr>
+          <p:cNvPr id="4" name="Slide Number Placeholder 3"/>
+          <p:cNvSpPr>
+            <a:spLocks noGrp="1"/>
+          </p:cNvSpPr>
+          <p:nvPr>
+            <p:ph type="sldNum" idx="5" sz="quarter"/>
+          </p:nvPr>
+        </p:nvSpPr>
+        <p:spPr/>
+      </p:sp>
+    </p:spTree>
+  </p:cSld>
+  <p:clrMapOvr>
+    <a:masterClrMapping/>
+  </p:clrMapOvr>
+</p:notes>
+</file>
+
+<file path=ppt/notesSlides/notesSlide11.xml><?xml version="1.0" encoding="utf-8"?>
+<p:notes xmlns:a="http://schemas.openxmlformats.org/drawingml/2006/main" xmlns:p="http://schemas.openxmlformats.org/presentationml/2006/main" xmlns:r="http://schemas.openxmlformats.org/officeDocument/2006/relationships">
+  <p:cSld>
+    <p:spTree>
+      <p:nvGrpSpPr>
+        <p:cNvPr id="1" name=""/>
+        <p:cNvGrpSpPr/>
+        <p:nvPr/>
+      </p:nvGrpSpPr>
+      <p:grpSpPr>
+        <a:xfrm>
+          <a:off x="0" y="0"/>
+          <a:ext cx="0" cy="0"/>
+          <a:chOff x="0" y="0"/>
+          <a:chExt cx="0" cy="0"/>
+        </a:xfrm>
+      </p:grpSpPr>
+      <p:sp>
+        <p:nvSpPr>
+          <p:cNvPr id="2" name="Slide Image Placeholder 1"/>
+          <p:cNvSpPr>
+            <a:spLocks noGrp="1"/>
+          </p:cNvSpPr>
+          <p:nvPr>
+            <p:ph type="sldImg" idx="2"/>
+          </p:nvPr>
+        </p:nvSpPr>
+        <p:spPr/>
+      </p:sp>
+      <p:sp>
+        <p:nvSpPr>
+          <p:cNvPr id="3" name="Notes Placeholder 2"/>
+          <p:cNvSpPr>
+            <a:spLocks noGrp="1"/>
+          </p:cNvSpPr>
+          <p:nvPr>
+            <p:ph type="body" idx="3" sz="quarter"/>
+          </p:nvPr>
+        </p:nvSpPr>
+        <p:spPr/>
+        <p:txBody>
+          <a:bodyPr/>
+          <a:lstStyle/>
+          <a:p>
+            <a:r>
+              <a:t>BACKUP, not part of the talk. Use if asked about prior work.</a:t>
+            </a:r>
+          </a:p>
+          <a:p/>
+          <a:p>
+            <a:r>
+              <a:t>The two that matter: [1] is the frontier paper on this exact shock and it works at HS-10, stating that the 2018 tariff increases were 'predominantly set at the 8-digit Harmonized System level'. That is why we pull at HS10 and analyse at HS8.</a:t>
+            </a:r>
+          </a:p>
+          <a:p/>
+          <a:p>
+            <a:r>
+              <a:t>[2] is USITC's own work estimating the same elasticity at HTS 2, 4, 6 and 8 digits and finding that estimates from aggregated data are smaller, which they attribute to heterogeneity bias. Our 5% number is the specific version of that general result.</a:t>
+            </a:r>
+          </a:p>
+          <a:p/>
+          <a:p>
+            <a:r>
+              <a:t>[4] faced the same problem and solved it the way we did: a continuous value-weighted coverage share instead of a binary tariffed/not flag.</a:t>
+            </a:r>
+          </a:p>
+          <a:p/>
+          <a:p>
+            <a:r>
+              <a:t>Worth saying plainly if asked: nobody appears to have published the specific diagnostic we ran, which is to assign treatment at chapter level when the tariff names HS8 and measure how much of the chapter that actually covers. The general attenuation result is known; the number for US tariff actions is ours.</a:t>
             </a:r>
           </a:p>
         </p:txBody>
@@ -4944,6 +5039,644 @@
 </p:sld>
 </file>
 
+<file path=ppt/slides/slide11.xml><?xml version="1.0" encoding="utf-8"?>
+<p:sld xmlns:a="http://schemas.openxmlformats.org/drawingml/2006/main" xmlns:p="http://schemas.openxmlformats.org/presentationml/2006/main" xmlns:r="http://schemas.openxmlformats.org/officeDocument/2006/relationships">
+  <p:cSld>
+    <p:spTree>
+      <p:nvGrpSpPr>
+        <p:cNvPr id="1" name=""/>
+        <p:cNvGrpSpPr/>
+        <p:nvPr/>
+      </p:nvGrpSpPr>
+      <p:grpSpPr/>
+      <p:sp>
+        <p:nvSpPr>
+          <p:cNvPr id="2" name="TextBox 1"/>
+          <p:cNvSpPr txBox="1"/>
+          <p:nvPr/>
+        </p:nvSpPr>
+        <p:spPr>
+          <a:xfrm>
+            <a:off x="5486400" y="292608"/>
+            <a:ext cx="6016752" cy="274320"/>
+          </a:xfrm>
+          <a:prstGeom prst="rect">
+            <a:avLst/>
+          </a:prstGeom>
+          <a:noFill/>
+        </p:spPr>
+        <p:txBody>
+          <a:bodyPr wrap="square">
+            <a:spAutoFit/>
+          </a:bodyPr>
+          <a:lstStyle/>
+          <a:p>
+            <a:pPr algn="r">
+              <a:lnSpc>
+                <a:spcPct val="100000"/>
+              </a:lnSpc>
+            </a:pPr>
+            <a:r>
+              <a:rPr sz="900" b="0" i="0">
+                <a:solidFill>
+                  <a:srgbClr val="6E737C"/>
+                </a:solidFill>
+                <a:latin typeface="Avenir Next"/>
+              </a:rPr>
+              <a:t>RAHUL REDDY MANDADI   +   RAUNAKSINGH KHALSA</a:t>
+            </a:r>
+          </a:p>
+        </p:txBody>
+      </p:sp>
+      <p:cxnSp>
+        <p:nvCxnSpPr>
+          <p:cNvPr id="3" name="Connector 2"/>
+          <p:cNvCxnSpPr/>
+          <p:nvPr/>
+        </p:nvCxnSpPr>
+        <p:spPr>
+          <a:xfrm>
+            <a:off x="685800" y="676656"/>
+            <a:ext cx="10817352" cy="0"/>
+          </a:xfrm>
+          <a:prstGeom prst="line">
+            <a:avLst/>
+          </a:prstGeom>
+          <a:ln w="9525">
+            <a:solidFill>
+              <a:srgbClr val="6E737C"/>
+            </a:solidFill>
+          </a:ln>
+        </p:spPr>
+        <p:style>
+          <a:lnRef idx="2">
+            <a:schemeClr val="accent1"/>
+          </a:lnRef>
+          <a:fillRef idx="0">
+            <a:schemeClr val="accent1"/>
+          </a:fillRef>
+          <a:effectRef idx="1">
+            <a:schemeClr val="accent1"/>
+          </a:effectRef>
+          <a:fontRef idx="minor">
+            <a:schemeClr val="tx1"/>
+          </a:fontRef>
+        </p:style>
+      </p:cxnSp>
+      <p:sp>
+        <p:nvSpPr>
+          <p:cNvPr id="4" name="TextBox 3"/>
+          <p:cNvSpPr txBox="1"/>
+          <p:nvPr/>
+        </p:nvSpPr>
+        <p:spPr>
+          <a:xfrm>
+            <a:off x="685800" y="868680"/>
+            <a:ext cx="10817352" cy="731520"/>
+          </a:xfrm>
+          <a:prstGeom prst="rect">
+            <a:avLst/>
+          </a:prstGeom>
+          <a:noFill/>
+        </p:spPr>
+        <p:txBody>
+          <a:bodyPr wrap="square">
+            <a:spAutoFit/>
+          </a:bodyPr>
+          <a:lstStyle/>
+          <a:p>
+            <a:pPr algn="l">
+              <a:lnSpc>
+                <a:spcPct val="100000"/>
+              </a:lnSpc>
+            </a:pPr>
+            <a:r>
+              <a:rPr sz="3800" b="1" i="0">
+                <a:solidFill>
+                  <a:srgbClr val="14161A"/>
+                </a:solidFill>
+                <a:latin typeface="Avenir Next"/>
+              </a:rPr>
+              <a:t>Backup: references.</a:t>
+            </a:r>
+          </a:p>
+        </p:txBody>
+      </p:sp>
+      <p:sp>
+        <p:nvSpPr>
+          <p:cNvPr id="5" name="TextBox 4"/>
+          <p:cNvSpPr txBox="1"/>
+          <p:nvPr/>
+        </p:nvSpPr>
+        <p:spPr>
+          <a:xfrm>
+            <a:off x="685800" y="1783080"/>
+            <a:ext cx="10817352" cy="310896"/>
+          </a:xfrm>
+          <a:prstGeom prst="rect">
+            <a:avLst/>
+          </a:prstGeom>
+          <a:noFill/>
+        </p:spPr>
+        <p:txBody>
+          <a:bodyPr wrap="square">
+            <a:spAutoFit/>
+          </a:bodyPr>
+          <a:lstStyle/>
+          <a:p>
+            <a:pPr algn="l">
+              <a:lnSpc>
+                <a:spcPct val="100000"/>
+              </a:lnSpc>
+            </a:pPr>
+            <a:r>
+              <a:rPr sz="1300" b="0" i="0">
+                <a:solidFill>
+                  <a:srgbClr val="14161A"/>
+                </a:solidFill>
+                <a:latin typeface="Avenir Next"/>
+              </a:rPr>
+              <a:t>[1]  Fajgelbaum, P., Goldberg, P., Kennedy, P. and Khandelwal, A. (2020). The Return to</a:t>
+            </a:r>
+          </a:p>
+        </p:txBody>
+      </p:sp>
+      <p:sp>
+        <p:nvSpPr>
+          <p:cNvPr id="6" name="TextBox 5"/>
+          <p:cNvSpPr txBox="1"/>
+          <p:nvPr/>
+        </p:nvSpPr>
+        <p:spPr>
+          <a:xfrm>
+            <a:off x="685800" y="2057400"/>
+            <a:ext cx="10817352" cy="310896"/>
+          </a:xfrm>
+          <a:prstGeom prst="rect">
+            <a:avLst/>
+          </a:prstGeom>
+          <a:noFill/>
+        </p:spPr>
+        <p:txBody>
+          <a:bodyPr wrap="square">
+            <a:spAutoFit/>
+          </a:bodyPr>
+          <a:lstStyle/>
+          <a:p>
+            <a:pPr algn="l">
+              <a:lnSpc>
+                <a:spcPct val="100000"/>
+              </a:lnSpc>
+            </a:pPr>
+            <a:r>
+              <a:rPr sz="1300" b="0" i="0">
+                <a:solidFill>
+                  <a:srgbClr val="6E737C"/>
+                </a:solidFill>
+                <a:latin typeface="Avenir Next"/>
+              </a:rPr>
+              <a:t>       Protectionism. Quarterly Journal of Economics 135(1), 1-55.</a:t>
+            </a:r>
+          </a:p>
+        </p:txBody>
+      </p:sp>
+      <p:sp>
+        <p:nvSpPr>
+          <p:cNvPr id="7" name="TextBox 6"/>
+          <p:cNvSpPr txBox="1"/>
+          <p:nvPr/>
+        </p:nvSpPr>
+        <p:spPr>
+          <a:xfrm>
+            <a:off x="685800" y="2331720"/>
+            <a:ext cx="10817352" cy="310896"/>
+          </a:xfrm>
+          <a:prstGeom prst="rect">
+            <a:avLst/>
+          </a:prstGeom>
+          <a:noFill/>
+        </p:spPr>
+        <p:txBody>
+          <a:bodyPr wrap="square">
+            <a:spAutoFit/>
+          </a:bodyPr>
+          <a:lstStyle/>
+          <a:p>
+            <a:pPr algn="l">
+              <a:lnSpc>
+                <a:spcPct val="100000"/>
+              </a:lnSpc>
+            </a:pPr>
+            <a:r>
+              <a:rPr sz="1300" b="0" i="0">
+                <a:solidFill>
+                  <a:srgbClr val="14161A"/>
+                </a:solidFill>
+                <a:latin typeface="Avenir Next"/>
+              </a:rPr>
+              <a:t>[2]  Schrammel, M. and Schreiber, S. (2023). How Does Data Aggregation Impact Elasticity of</a:t>
+            </a:r>
+          </a:p>
+        </p:txBody>
+      </p:sp>
+      <p:sp>
+        <p:nvSpPr>
+          <p:cNvPr id="8" name="TextBox 7"/>
+          <p:cNvSpPr txBox="1"/>
+          <p:nvPr/>
+        </p:nvSpPr>
+        <p:spPr>
+          <a:xfrm>
+            <a:off x="685800" y="2606039"/>
+            <a:ext cx="10817352" cy="310896"/>
+          </a:xfrm>
+          <a:prstGeom prst="rect">
+            <a:avLst/>
+          </a:prstGeom>
+          <a:noFill/>
+        </p:spPr>
+        <p:txBody>
+          <a:bodyPr wrap="square">
+            <a:spAutoFit/>
+          </a:bodyPr>
+          <a:lstStyle/>
+          <a:p>
+            <a:pPr algn="l">
+              <a:lnSpc>
+                <a:spcPct val="100000"/>
+              </a:lnSpc>
+            </a:pPr>
+            <a:r>
+              <a:rPr sz="1300" b="0" i="0">
+                <a:solidFill>
+                  <a:srgbClr val="6E737C"/>
+                </a:solidFill>
+                <a:latin typeface="Avenir Next"/>
+              </a:rPr>
+              <a:t>       Substitution Estimation? USITC Economics Working Paper 2023-10-B.</a:t>
+            </a:r>
+          </a:p>
+        </p:txBody>
+      </p:sp>
+      <p:sp>
+        <p:nvSpPr>
+          <p:cNvPr id="9" name="TextBox 8"/>
+          <p:cNvSpPr txBox="1"/>
+          <p:nvPr/>
+        </p:nvSpPr>
+        <p:spPr>
+          <a:xfrm>
+            <a:off x="685800" y="2880359"/>
+            <a:ext cx="10817352" cy="310896"/>
+          </a:xfrm>
+          <a:prstGeom prst="rect">
+            <a:avLst/>
+          </a:prstGeom>
+          <a:noFill/>
+        </p:spPr>
+        <p:txBody>
+          <a:bodyPr wrap="square">
+            <a:spAutoFit/>
+          </a:bodyPr>
+          <a:lstStyle/>
+          <a:p>
+            <a:pPr algn="l">
+              <a:lnSpc>
+                <a:spcPct val="100000"/>
+              </a:lnSpc>
+            </a:pPr>
+            <a:r>
+              <a:rPr sz="1300" b="0" i="0">
+                <a:solidFill>
+                  <a:srgbClr val="14161A"/>
+                </a:solidFill>
+                <a:latin typeface="Avenir Next"/>
+              </a:rPr>
+              <a:t>[3]  Imbs, J. and Mejean, I. (2015). Elasticity Optimism. American Economic Journal:</a:t>
+            </a:r>
+          </a:p>
+        </p:txBody>
+      </p:sp>
+      <p:sp>
+        <p:nvSpPr>
+          <p:cNvPr id="10" name="TextBox 9"/>
+          <p:cNvSpPr txBox="1"/>
+          <p:nvPr/>
+        </p:nvSpPr>
+        <p:spPr>
+          <a:xfrm>
+            <a:off x="685800" y="3154679"/>
+            <a:ext cx="10817352" cy="310896"/>
+          </a:xfrm>
+          <a:prstGeom prst="rect">
+            <a:avLst/>
+          </a:prstGeom>
+          <a:noFill/>
+        </p:spPr>
+        <p:txBody>
+          <a:bodyPr wrap="square">
+            <a:spAutoFit/>
+          </a:bodyPr>
+          <a:lstStyle/>
+          <a:p>
+            <a:pPr algn="l">
+              <a:lnSpc>
+                <a:spcPct val="100000"/>
+              </a:lnSpc>
+            </a:pPr>
+            <a:r>
+              <a:rPr sz="1300" b="0" i="0">
+                <a:solidFill>
+                  <a:srgbClr val="6E737C"/>
+                </a:solidFill>
+                <a:latin typeface="Avenir Next"/>
+              </a:rPr>
+              <a:t>       Macroeconomics 7(3), 43-83.</a:t>
+            </a:r>
+          </a:p>
+        </p:txBody>
+      </p:sp>
+      <p:sp>
+        <p:nvSpPr>
+          <p:cNvPr id="11" name="TextBox 10"/>
+          <p:cNvSpPr txBox="1"/>
+          <p:nvPr/>
+        </p:nvSpPr>
+        <p:spPr>
+          <a:xfrm>
+            <a:off x="685800" y="3428999"/>
+            <a:ext cx="10817352" cy="310896"/>
+          </a:xfrm>
+          <a:prstGeom prst="rect">
+            <a:avLst/>
+          </a:prstGeom>
+          <a:noFill/>
+        </p:spPr>
+        <p:txBody>
+          <a:bodyPr wrap="square">
+            <a:spAutoFit/>
+          </a:bodyPr>
+          <a:lstStyle/>
+          <a:p>
+            <a:pPr algn="l">
+              <a:lnSpc>
+                <a:spcPct val="100000"/>
+              </a:lnSpc>
+            </a:pPr>
+            <a:r>
+              <a:rPr sz="1300" b="0" i="0">
+                <a:solidFill>
+                  <a:srgbClr val="14161A"/>
+                </a:solidFill>
+                <a:latin typeface="Avenir Next"/>
+              </a:rPr>
+              <a:t>[4]  Flaaen, A. and Pierce, J. (2019). Disentangling the Effects of the 2018-2019 Tariffs on a</a:t>
+            </a:r>
+          </a:p>
+        </p:txBody>
+      </p:sp>
+      <p:sp>
+        <p:nvSpPr>
+          <p:cNvPr id="12" name="TextBox 11"/>
+          <p:cNvSpPr txBox="1"/>
+          <p:nvPr/>
+        </p:nvSpPr>
+        <p:spPr>
+          <a:xfrm>
+            <a:off x="685800" y="3703319"/>
+            <a:ext cx="10817352" cy="310896"/>
+          </a:xfrm>
+          <a:prstGeom prst="rect">
+            <a:avLst/>
+          </a:prstGeom>
+          <a:noFill/>
+        </p:spPr>
+        <p:txBody>
+          <a:bodyPr wrap="square">
+            <a:spAutoFit/>
+          </a:bodyPr>
+          <a:lstStyle/>
+          <a:p>
+            <a:pPr algn="l">
+              <a:lnSpc>
+                <a:spcPct val="100000"/>
+              </a:lnSpc>
+            </a:pPr>
+            <a:r>
+              <a:rPr sz="1300" b="0" i="0">
+                <a:solidFill>
+                  <a:srgbClr val="6E737C"/>
+                </a:solidFill>
+                <a:latin typeface="Avenir Next"/>
+              </a:rPr>
+              <a:t>       Globally Connected U.S. Manufacturing Sector. Federal Reserve FEDS 2019-086.</a:t>
+            </a:r>
+          </a:p>
+        </p:txBody>
+      </p:sp>
+      <p:sp>
+        <p:nvSpPr>
+          <p:cNvPr id="13" name="TextBox 12"/>
+          <p:cNvSpPr txBox="1"/>
+          <p:nvPr/>
+        </p:nvSpPr>
+        <p:spPr>
+          <a:xfrm>
+            <a:off x="685800" y="3977639"/>
+            <a:ext cx="10817352" cy="310896"/>
+          </a:xfrm>
+          <a:prstGeom prst="rect">
+            <a:avLst/>
+          </a:prstGeom>
+          <a:noFill/>
+        </p:spPr>
+        <p:txBody>
+          <a:bodyPr wrap="square">
+            <a:spAutoFit/>
+          </a:bodyPr>
+          <a:lstStyle/>
+          <a:p>
+            <a:pPr algn="l">
+              <a:lnSpc>
+                <a:spcPct val="100000"/>
+              </a:lnSpc>
+            </a:pPr>
+            <a:r>
+              <a:rPr sz="1300" b="0" i="0">
+                <a:solidFill>
+                  <a:srgbClr val="14161A"/>
+                </a:solidFill>
+                <a:latin typeface="Avenir Next"/>
+              </a:rPr>
+              <a:t>[5]  Khan, S. Y. and Khederlarian, A. (2021). How does trade respond to anticipated tariff</a:t>
+            </a:r>
+          </a:p>
+        </p:txBody>
+      </p:sp>
+      <p:sp>
+        <p:nvSpPr>
+          <p:cNvPr id="14" name="TextBox 13"/>
+          <p:cNvSpPr txBox="1"/>
+          <p:nvPr/>
+        </p:nvSpPr>
+        <p:spPr>
+          <a:xfrm>
+            <a:off x="685800" y="4251959"/>
+            <a:ext cx="10817352" cy="310896"/>
+          </a:xfrm>
+          <a:prstGeom prst="rect">
+            <a:avLst/>
+          </a:prstGeom>
+          <a:noFill/>
+        </p:spPr>
+        <p:txBody>
+          <a:bodyPr wrap="square">
+            <a:spAutoFit/>
+          </a:bodyPr>
+          <a:lstStyle/>
+          <a:p>
+            <a:pPr algn="l">
+              <a:lnSpc>
+                <a:spcPct val="100000"/>
+              </a:lnSpc>
+            </a:pPr>
+            <a:r>
+              <a:rPr sz="1300" b="0" i="0">
+                <a:solidFill>
+                  <a:srgbClr val="6E737C"/>
+                </a:solidFill>
+                <a:latin typeface="Avenir Next"/>
+              </a:rPr>
+              <a:t>       changes? Evidence from NAFTA. Journal of International Economics 133, 103538.</a:t>
+            </a:r>
+          </a:p>
+        </p:txBody>
+      </p:sp>
+      <p:sp>
+        <p:nvSpPr>
+          <p:cNvPr id="15" name="TextBox 14"/>
+          <p:cNvSpPr txBox="1"/>
+          <p:nvPr/>
+        </p:nvSpPr>
+        <p:spPr>
+          <a:xfrm>
+            <a:off x="685800" y="4526279"/>
+            <a:ext cx="10817352" cy="310896"/>
+          </a:xfrm>
+          <a:prstGeom prst="rect">
+            <a:avLst/>
+          </a:prstGeom>
+          <a:noFill/>
+        </p:spPr>
+        <p:txBody>
+          <a:bodyPr wrap="square">
+            <a:spAutoFit/>
+          </a:bodyPr>
+          <a:lstStyle/>
+          <a:p>
+            <a:pPr algn="l">
+              <a:lnSpc>
+                <a:spcPct val="100000"/>
+              </a:lnSpc>
+            </a:pPr>
+            <a:r>
+              <a:rPr sz="1300" b="0" i="0">
+                <a:solidFill>
+                  <a:srgbClr val="14161A"/>
+                </a:solidFill>
+                <a:latin typeface="Avenir Next"/>
+              </a:rPr>
+              <a:t>[6]  Cleveland, R., Cleveland, W., McRae, J. and Terpenning, I. (1990). STL: A seasonal-trend</a:t>
+            </a:r>
+          </a:p>
+        </p:txBody>
+      </p:sp>
+      <p:sp>
+        <p:nvSpPr>
+          <p:cNvPr id="16" name="TextBox 15"/>
+          <p:cNvSpPr txBox="1"/>
+          <p:nvPr/>
+        </p:nvSpPr>
+        <p:spPr>
+          <a:xfrm>
+            <a:off x="685800" y="4800599"/>
+            <a:ext cx="10817352" cy="310896"/>
+          </a:xfrm>
+          <a:prstGeom prst="rect">
+            <a:avLst/>
+          </a:prstGeom>
+          <a:noFill/>
+        </p:spPr>
+        <p:txBody>
+          <a:bodyPr wrap="square">
+            <a:spAutoFit/>
+          </a:bodyPr>
+          <a:lstStyle/>
+          <a:p>
+            <a:pPr algn="l">
+              <a:lnSpc>
+                <a:spcPct val="100000"/>
+              </a:lnSpc>
+            </a:pPr>
+            <a:r>
+              <a:rPr sz="1300" b="0" i="0">
+                <a:solidFill>
+                  <a:srgbClr val="6E737C"/>
+                </a:solidFill>
+                <a:latin typeface="Avenir Next"/>
+              </a:rPr>
+              <a:t>       decomposition procedure based on LOESS. Journal of Official Statistics 6(1), 3-73.</a:t>
+            </a:r>
+          </a:p>
+        </p:txBody>
+      </p:sp>
+      <p:sp>
+        <p:nvSpPr>
+          <p:cNvPr id="17" name="TextBox 16"/>
+          <p:cNvSpPr txBox="1"/>
+          <p:nvPr/>
+        </p:nvSpPr>
+        <p:spPr>
+          <a:xfrm>
+            <a:off x="685800" y="5897880"/>
+            <a:ext cx="10817352" cy="457200"/>
+          </a:xfrm>
+          <a:prstGeom prst="rect">
+            <a:avLst/>
+          </a:prstGeom>
+          <a:noFill/>
+        </p:spPr>
+        <p:txBody>
+          <a:bodyPr wrap="square">
+            <a:spAutoFit/>
+          </a:bodyPr>
+          <a:lstStyle/>
+          <a:p>
+            <a:pPr algn="l">
+              <a:lnSpc>
+                <a:spcPct val="100000"/>
+              </a:lnSpc>
+            </a:pPr>
+            <a:r>
+              <a:rPr sz="1400" b="0" i="0">
+                <a:solidFill>
+                  <a:srgbClr val="6E737C"/>
+                </a:solidFill>
+                <a:latin typeface="Avenir Next"/>
+              </a:rPr>
+              <a:t>Data: US Census international trade API  |  Federal Register API  |  USITC Harmonized Tariff Schedule, chapter 99</a:t>
+            </a:r>
+          </a:p>
+        </p:txBody>
+      </p:sp>
+    </p:spTree>
+  </p:cSld>
+  <p:clrMapOvr>
+    <a:masterClrMapping/>
+  </p:clrMapOvr>
+</p:sld>
+</file>
+
 <file path=ppt/slides/slide2.xml><?xml version="1.0" encoding="utf-8"?>
 <p:sld xmlns:a="http://schemas.openxmlformats.org/drawingml/2006/main" xmlns:p="http://schemas.openxmlformats.org/presentationml/2006/main" xmlns:r="http://schemas.openxmlformats.org/officeDocument/2006/relationships">
   <p:cSld>
@@ -6693,6 +7426,22 @@
                 <a:latin typeface="Avenir Next"/>
               </a:rPr>
               <a:t>Fig. 5   The typical tariff action covers about 5% of its chapter's value. A third cover under 1%.</a:t>
+            </a:r>
+          </a:p>
+          <a:p>
+            <a:pPr algn="l">
+              <a:lnSpc>
+                <a:spcPct val="112000"/>
+              </a:lnSpc>
+            </a:pPr>
+            <a:r>
+              <a:rPr sz="1700" b="0" i="0">
+                <a:solidFill>
+                  <a:srgbClr val="6E737C"/>
+                </a:solidFill>
+                <a:latin typeface="Avenir Next"/>
+              </a:rPr>
+              <a:t>Published work measures these at HS-8 to HS-10 [1]. Coarser data shrinks estimates [2].</a:t>
             </a:r>
           </a:p>
         </p:txBody>

--- a/slides/Mandadi_Khalsa_Presentation1.pptx
+++ b/slides/Mandadi_Khalsa_Presentation1.pptx
@@ -517,12 +517,12 @@
           </a:p>
           <a:p>
             <a:r>
-              <a:t>Eight slides for 10-15 minutes. Slides 2, 3 and 8 need the most time; 4 and 5 the least.</a:t>
-            </a:r>
-          </a:p>
-          <a:p>
-            <a:r>
-              <a:t>Slides 9 and 10 are backup for questions, not part of the talk.</a:t>
+              <a:t>Eight slides for 10-15 minutes. Slides 2, 3 and 7 need the most time; 4 and 5 the least.</a:t>
+            </a:r>
+          </a:p>
+          <a:p>
+            <a:r>
+              <a:t>Slides 9, 10 and 11 are backup for questions, not part of the talk.</a:t>
             </a:r>
           </a:p>
           <a:p/>
@@ -657,7 +657,7 @@
           <a:p/>
           <a:p>
             <a:r>
-              <a:t>Aluminium does NOT clear: it peaks at 26% against a band of 100%, because its own history is volatile. Same tariff year, and the test says no. A test that can say no is the only kind worth having.</a:t>
+              <a:t>Aluminum does NOT clear: it peaks at 26% against a band of 100%, because its own history is volatile. Same tariff year, and the test says no. A test that can say no is the only kind worth having.</a:t>
             </a:r>
           </a:p>
         </p:txBody>
@@ -751,6 +751,12 @@
           <a:p/>
           <a:p>
             <a:r>
+              <a:t>[3] is the general statement of the same aggregation problem outside tariffs. [5] is the closest prior work on front-loading itself: trade responds to tariff changes that are announced in advance, which is the behaviour slide 2 shows. [6] is the decomposition behind the normal range on slide 6 and backup slide 10.</a:t>
+            </a:r>
+          </a:p>
+          <a:p/>
+          <a:p>
+            <a:r>
               <a:t>Worth saying plainly if asked: nobody appears to have published the specific diagnostic we ran, which is to assign treatment at chapter level when the tariff names HS8 and measure how much of the chapter that actually covers. The general attenuation result is known; the number for US tariff actions is ours.</a:t>
             </a:r>
           </a:p>
@@ -845,7 +851,13 @@
           <a:p/>
           <a:p>
             <a:r>
-              <a:t>This behaviour is called front-loading. That is the whole subject of the project.</a:t>
+              <a:t>This behavior is called front-loading. That is the whole subject of the project.</a:t>
+            </a:r>
+          </a:p>
+          <a:p/>
+          <a:p>
+            <a:r>
+              <a:t>Define BORROWED here, out loud, because it is the title of the project: goods that would have been imported in October arrive in August instead. Nothing was created or destroyed, it just moved. If the whole dip afterwards is that, it is borrowed. If some of it never comes back, it is real. That is what we are trying to tell apart.</a:t>
             </a:r>
           </a:p>
         </p:txBody>
@@ -1009,7 +1021,7 @@
           <a:p/>
           <a:p>
             <a:r>
-              <a:t>Question 1 is the rush. Question 2 is what the drop afterwards actually means, which is the hard one. Question 3 is duration.</a:t>
+              <a:t>Question 1 is the rush. Question 2 is what the drop afterwards actually means, which is the hard one: borrowed means the goods arrive early and the dip is just payback, lost means that demand never comes back, and bought from somewhere else means the same goods arrive from a different country. Question 3 is how long it lasts.</a:t>
             </a:r>
           </a:p>
           <a:p/>
@@ -1097,13 +1109,13 @@
           <a:p/>
           <a:p>
             <a:r>
-              <a:t>Right: what a row actually is. One product, one country, one month. Value is always reported. Weight in kilograms is reported for about 91% of rows and is the better measure, because it does not move when prices move, and it counts goods arriving by truck and rail which the shipping-weight columns miss entirely.</a:t>
+              <a:t>Right: what a row actually is. One 8-digit product, one country, one month. Chapter 74 is copper; inside it are 88 separate 8-digit lines in that month alone, and a tariff names lines, not chapters. Value is always reported. Weight in kilograms is reported for about 91% of rows and is the better measure, because it does not move when prices move, and it counts goods arriving by truck and rail which the shipping-weight columns miss entirely.</a:t>
             </a:r>
           </a:p>
           <a:p/>
           <a:p>
             <a:r>
-              <a:t>The important choice: we pull at 10 digits. Tariff orders are written at 8, and 10 nests inside 8, so we can match a tariff to exactly the products it names instead of guessing. Say this slowly, it matters for slide 8.</a:t>
+              <a:t>The important choice: we pull at 10 digits. Tariff orders are written at 8, and 10 nests inside 8, so we can match a tariff to exactly the products it names instead of guessing. Say this slowly, it matters for slide 7.</a:t>
             </a:r>
           </a:p>
           <a:p/>
@@ -1203,13 +1215,13 @@
           <a:p/>
           <a:p>
             <a:r>
-              <a:t>Some are not. Silk is a 60-million-dollar chapter, so almost any month looks extreme next to its own history. Works of art and clocks are small and lumpy.</a:t>
+              <a:t>Some are not. Silk is a 55-million-dollar chapter, so almost any month looks extreme next to its own history. Works of art and clocks are small and lumpy.</a:t>
             </a:r>
           </a:p>
           <a:p/>
           <a:p>
             <a:r>
-              <a:t>Cocoa is the one to dwell on. It sits high because cocoa prices roughly tripled after bad West African harvests. We measure in dollars, so a price spike reads as a volume surge.</a:t>
+              <a:t>Cocoa is the one to dwell on. It is on the list because cocoa prices roughly tripled after bad West African harvests. We measure in dollars, so a price spike reads as a volume surge.</a:t>
             </a:r>
           </a:p>
           <a:p/>
@@ -1297,7 +1309,7 @@
           <a:p/>
           <a:p>
             <a:r>
-              <a:t>We read them: 9,083 distinct 8-digit codes across 162 actions.</a:t>
+              <a:t>We read them: 9,083 distinct 8-digit codes across 162 surcharge codes. Say 'surcharge codes' and not 'actions', because 134 is the number of Federal Register actions and the two are not the same thing.</a:t>
             </a:r>
           </a:p>
           <a:p/>
@@ -1332,12 +1344,18 @@
           </a:p>
           <a:p>
             <a:r>
-              <a:t>Ten separate tariff actions touch copper, chapter 74. Three of them cover more than half the chapter: 95%, 59%, 59%. The other seven cover under 1%, and several are civil-aircraft carve-outs that name a single product line. The median action touching copper covers 0.1% of it.</a:t>
+              <a:t>Ten separate tariff actions touch copper, chapter 74. Three of them cover more than half the chapter: 95%, 59%, 59%. The other seven cover under 1%, and several are civil-aircraft carve-outs that name a single product line. The median action touching copper covers less than a tenth of one percent of it.</a:t>
             </a:r>
           </a:p>
           <a:p>
             <a:r>
               <a:t>So if you mark copper as tariffed whenever any action fires, seven times out of ten you have flagged an entire chapter over something touching less than one percent of it. That is what the chart shows, across all 1,350 action-chapter pairs.</a:t>
+            </a:r>
+          </a:p>
+          <a:p/>
+          <a:p>
+            <a:r>
+              <a:t>IF ASKED '5% of what exactly': the median is taken over the 1,350 action-chapter pairs. Collapse it to one number per action and the median is 1.3%, so the slide is the conservative version.</a:t>
             </a:r>
           </a:p>
         </p:txBody>
@@ -1414,6 +1432,12 @@
           <a:p>
             <a:r>
               <a:t>Be straight that this is data and limits, not results. Results come next.</a:t>
+            </a:r>
+          </a:p>
+          <a:p/>
+          <a:p>
+            <a:r>
+              <a:t>The fourth pair is the one to land, because it closes the problem slide 6 opened. Slide 6 said the detector cannot tell a tariff from a price shock. The answer is to stop comparing a product to its own past and start comparing it across origins in the same month: cocoa got more expensive for everyone, so every origin moves together and the comparison cancels it out. A tariff hits one origin, so it does not cancel. That one sentence is the method of the whole project.</a:t>
             </a:r>
           </a:p>
           <a:p/>
@@ -4513,48 +4537,9 @@
         <p:nvPr/>
       </p:nvGrpSpPr>
       <p:grpSpPr/>
-      <p:sp>
-        <p:nvSpPr>
-          <p:cNvPr id="2" name="TextBox 1"/>
-          <p:cNvSpPr txBox="1"/>
-          <p:nvPr/>
-        </p:nvSpPr>
-        <p:spPr>
-          <a:xfrm>
-            <a:off x="5486400" y="292608"/>
-            <a:ext cx="6016752" cy="274320"/>
-          </a:xfrm>
-          <a:prstGeom prst="rect">
-            <a:avLst/>
-          </a:prstGeom>
-          <a:noFill/>
-        </p:spPr>
-        <p:txBody>
-          <a:bodyPr wrap="square">
-            <a:spAutoFit/>
-          </a:bodyPr>
-          <a:lstStyle/>
-          <a:p>
-            <a:pPr algn="r">
-              <a:lnSpc>
-                <a:spcPct val="100000"/>
-              </a:lnSpc>
-            </a:pPr>
-            <a:r>
-              <a:rPr sz="900" b="0" i="0">
-                <a:solidFill>
-                  <a:srgbClr val="6E737C"/>
-                </a:solidFill>
-                <a:latin typeface="Avenir Next"/>
-              </a:rPr>
-              <a:t>RAHUL REDDY MANDADI   +   RAUNAKSINGH KHALSA</a:t>
-            </a:r>
-          </a:p>
-        </p:txBody>
-      </p:sp>
       <p:cxnSp>
         <p:nvCxnSpPr>
-          <p:cNvPr id="3" name="Connector 2"/>
+          <p:cNvPr id="2" name="Connector 1"/>
           <p:cNvCxnSpPr/>
           <p:nvPr/>
         </p:nvCxnSpPr>
@@ -4589,14 +4574,53 @@
       </p:cxnSp>
       <p:sp>
         <p:nvSpPr>
+          <p:cNvPr id="3" name="TextBox 2"/>
+          <p:cNvSpPr txBox="1"/>
+          <p:nvPr/>
+        </p:nvSpPr>
+        <p:spPr>
+          <a:xfrm>
+            <a:off x="685800" y="1874519"/>
+            <a:ext cx="10817352" cy="960120"/>
+          </a:xfrm>
+          <a:prstGeom prst="rect">
+            <a:avLst/>
+          </a:prstGeom>
+          <a:noFill/>
+        </p:spPr>
+        <p:txBody>
+          <a:bodyPr wrap="square">
+            <a:spAutoFit/>
+          </a:bodyPr>
+          <a:lstStyle/>
+          <a:p>
+            <a:pPr algn="l">
+              <a:lnSpc>
+                <a:spcPct val="100000"/>
+              </a:lnSpc>
+            </a:pPr>
+            <a:r>
+              <a:rPr sz="4800" b="1" i="0">
+                <a:solidFill>
+                  <a:srgbClr val="14161A"/>
+                </a:solidFill>
+                <a:latin typeface="Avenir Next"/>
+              </a:rPr>
+              <a:t>Borrowed or Real</a:t>
+            </a:r>
+          </a:p>
+        </p:txBody>
+      </p:sp>
+      <p:sp>
+        <p:nvSpPr>
           <p:cNvPr id="4" name="TextBox 3"/>
           <p:cNvSpPr txBox="1"/>
           <p:nvPr/>
         </p:nvSpPr>
         <p:spPr>
           <a:xfrm>
-            <a:off x="685800" y="1874519"/>
-            <a:ext cx="10817352" cy="960120"/>
+            <a:off x="685800" y="2852928"/>
+            <a:ext cx="10817352" cy="640080"/>
           </a:xfrm>
           <a:prstGeom prst="rect">
             <a:avLst/>
@@ -4615,13 +4639,13 @@
               </a:lnSpc>
             </a:pPr>
             <a:r>
-              <a:rPr sz="4800" b="1" i="0">
-                <a:solidFill>
-                  <a:srgbClr val="14161A"/>
+              <a:rPr sz="2500" b="0" i="0">
+                <a:solidFill>
+                  <a:srgbClr val="C8102E"/>
                 </a:solidFill>
                 <a:latin typeface="Avenir Next"/>
               </a:rPr>
-              <a:t>Borrowed or Real</a:t>
+              <a:t>Forecasting import surges around U.S. tariffs</a:t>
             </a:r>
           </a:p>
         </p:txBody>
@@ -4634,8 +4658,8 @@
         </p:nvSpPr>
         <p:spPr>
           <a:xfrm>
-            <a:off x="685800" y="2852928"/>
-            <a:ext cx="10817352" cy="640080"/>
+            <a:off x="685800" y="3822191"/>
+            <a:ext cx="10817352" cy="457200"/>
           </a:xfrm>
           <a:prstGeom prst="rect">
             <a:avLst/>
@@ -4654,13 +4678,13 @@
               </a:lnSpc>
             </a:pPr>
             <a:r>
-              <a:rPr sz="2500" b="0" i="0">
-                <a:solidFill>
-                  <a:srgbClr val="C8102E"/>
+              <a:rPr sz="1800" b="1" i="0">
+                <a:solidFill>
+                  <a:srgbClr val="14161A"/>
                 </a:solidFill>
                 <a:latin typeface="Avenir Next"/>
               </a:rPr>
-              <a:t>Forecasting import surges around U.S. tariffs</a:t>
+              <a:t>Rahul Reddy Mandadi   +   Raunaksingh Khalsa</a:t>
             </a:r>
           </a:p>
         </p:txBody>
@@ -4673,7 +4697,7 @@
         </p:nvSpPr>
         <p:spPr>
           <a:xfrm>
-            <a:off x="685800" y="3822191"/>
+            <a:off x="685800" y="4261104"/>
             <a:ext cx="10817352" cy="457200"/>
           </a:xfrm>
           <a:prstGeom prst="rect">
@@ -4693,13 +4717,13 @@
               </a:lnSpc>
             </a:pPr>
             <a:r>
-              <a:rPr sz="1800" b="1" i="0">
-                <a:solidFill>
-                  <a:srgbClr val="14161A"/>
+              <a:rPr sz="1300" b="0" i="0">
+                <a:solidFill>
+                  <a:srgbClr val="6E737C"/>
                 </a:solidFill>
                 <a:latin typeface="Avenir Next"/>
               </a:rPr>
-              <a:t>Rahul Reddy Mandadi   +   Raunaksingh Khalsa</a:t>
+              <a:t>DS 5500 Data Science Capstone   |   Presentation 1   |   October 2026</a:t>
             </a:r>
           </a:p>
         </p:txBody>
@@ -4712,8 +4736,8 @@
         </p:nvSpPr>
         <p:spPr>
           <a:xfrm>
-            <a:off x="685800" y="4261104"/>
-            <a:ext cx="10817352" cy="457200"/>
+            <a:off x="685800" y="5047488"/>
+            <a:ext cx="10817352" cy="822960"/>
           </a:xfrm>
           <a:prstGeom prst="rect">
             <a:avLst/>
@@ -4738,7 +4762,23 @@
                 </a:solidFill>
                 <a:latin typeface="Avenir Next"/>
               </a:rPr>
-              <a:t>DS 5500 Data Science Capstone   |   Presentation 1   |   October 2026</a:t>
+              <a:t>Stakeholders: importers looking for a new supplier, lenders exposed to a single</a:t>
+            </a:r>
+          </a:p>
+          <a:p>
+            <a:pPr algn="l">
+              <a:lnSpc>
+                <a:spcPct val="100000"/>
+              </a:lnSpc>
+            </a:pPr>
+            <a:r>
+              <a:rPr sz="1300" b="0" i="0">
+                <a:solidFill>
+                  <a:srgbClr val="6E737C"/>
+                </a:solidFill>
+                <a:latin typeface="Avenir Next"/>
+              </a:rPr>
+              <a:t>origin, carriers serving an affected trade lane</a:t>
             </a:r>
           </a:p>
         </p:txBody>
@@ -4746,61 +4786,6 @@
       <p:sp>
         <p:nvSpPr>
           <p:cNvPr id="8" name="TextBox 7"/>
-          <p:cNvSpPr txBox="1"/>
-          <p:nvPr/>
-        </p:nvSpPr>
-        <p:spPr>
-          <a:xfrm>
-            <a:off x="685800" y="5047488"/>
-            <a:ext cx="10817352" cy="822960"/>
-          </a:xfrm>
-          <a:prstGeom prst="rect">
-            <a:avLst/>
-          </a:prstGeom>
-          <a:noFill/>
-        </p:spPr>
-        <p:txBody>
-          <a:bodyPr wrap="square">
-            <a:spAutoFit/>
-          </a:bodyPr>
-          <a:lstStyle/>
-          <a:p>
-            <a:pPr algn="l">
-              <a:lnSpc>
-                <a:spcPct val="100000"/>
-              </a:lnSpc>
-            </a:pPr>
-            <a:r>
-              <a:rPr sz="1300" b="0" i="0">
-                <a:solidFill>
-                  <a:srgbClr val="6E737C"/>
-                </a:solidFill>
-                <a:latin typeface="Avenir Next"/>
-              </a:rPr>
-              <a:t>Stakeholders: importers re-sourcing suppliers, lenders with exposure to a single</a:t>
-            </a:r>
-          </a:p>
-          <a:p>
-            <a:pPr algn="l">
-              <a:lnSpc>
-                <a:spcPct val="100000"/>
-              </a:lnSpc>
-            </a:pPr>
-            <a:r>
-              <a:rPr sz="1300" b="0" i="0">
-                <a:solidFill>
-                  <a:srgbClr val="6E737C"/>
-                </a:solidFill>
-                <a:latin typeface="Avenir Next"/>
-              </a:rPr>
-              <a:t>origin, carriers serving an affected trade lane</a:t>
-            </a:r>
-          </a:p>
-        </p:txBody>
-      </p:sp>
-      <p:sp>
-        <p:nvSpPr>
-          <p:cNvPr id="9" name="TextBox 8"/>
           <p:cNvSpPr txBox="1"/>
           <p:nvPr/>
         </p:nvSpPr>
@@ -5026,7 +5011,23 @@
                 </a:solidFill>
                 <a:latin typeface="Avenir Next"/>
               </a:rPr>
-              <a:t>Fig. 7   Copper against its own expected range, built only from data before the tariff.</a:t>
+              <a:t>Fig. 7   Copper against its own expected range, built only from data before the</a:t>
+            </a:r>
+          </a:p>
+          <a:p>
+            <a:pPr algn="l">
+              <a:lnSpc>
+                <a:spcPct val="112000"/>
+              </a:lnSpc>
+            </a:pPr>
+            <a:r>
+              <a:rPr sz="1700" b="0" i="0">
+                <a:solidFill>
+                  <a:srgbClr val="6E737C"/>
+                </a:solidFill>
+                <a:latin typeface="Avenir Next"/>
+              </a:rPr>
+              <a:t>tariff. Seasonal-trend decomposition, after Cleveland et al. [6].</a:t>
             </a:r>
           </a:p>
         </p:txBody>
@@ -5874,7 +5875,23 @@
                 </a:solidFill>
                 <a:latin typeface="Avenir Next"/>
               </a:rPr>
-              <a:t>That gap is a window to import before it applies.</a:t>
+              <a:t>That gap is a window to import before the duty applies. Goods pulled into it are</a:t>
+            </a:r>
+          </a:p>
+          <a:p>
+            <a:pPr algn="l">
+              <a:lnSpc>
+                <a:spcPct val="112000"/>
+              </a:lnSpc>
+            </a:pPr>
+            <a:r>
+              <a:rPr sz="1700" b="0" i="0">
+                <a:solidFill>
+                  <a:srgbClr val="6E737C"/>
+                </a:solidFill>
+                <a:latin typeface="Avenir Next"/>
+              </a:rPr>
+              <a:t>borrowed from later months, which is the question in our title [5].</a:t>
             </a:r>
           </a:p>
         </p:txBody>
@@ -6410,7 +6427,7 @@
                 </a:solidFill>
                 <a:latin typeface="Avenir Next"/>
               </a:rPr>
-              <a:t>three-way classification: borrowed, lost, or relocated</a:t>
+              <a:t>borrowed back, lost for good, or bought from somewhere else</a:t>
             </a:r>
           </a:p>
         </p:txBody>
@@ -6488,7 +6505,7 @@
                 </a:solidFill>
                 <a:latin typeface="Avenir Next"/>
               </a:rPr>
-              <a:t>duration, with censoring</a:t>
+              <a:t>duration, counting episodes still running</a:t>
             </a:r>
           </a:p>
         </p:txBody>
@@ -6721,7 +6738,7 @@
                 </a:solidFill>
                 <a:latin typeface="Avenir Next"/>
               </a:rPr>
-              <a:t>Copper, March 2025, biggest suppliers</a:t>
+              <a:t>Copper, March 2025.  Two separate 8-digit lines.</a:t>
             </a:r>
           </a:p>
         </p:txBody>
@@ -6760,7 +6777,7 @@
                 </a:solidFill>
                 <a:latin typeface="Courier New"/>
               </a:rPr>
-              <a:t>product  country     value, $          kg</a:t>
+              <a:t>product   country     value, $          kg</a:t>
             </a:r>
           </a:p>
           <a:p>
@@ -6776,7 +6793,7 @@
                 </a:solidFill>
                 <a:latin typeface="Courier New"/>
               </a:rPr>
-              <a:t>-----------------------------------------</a:t>
+              <a:t>------------------------------------------</a:t>
             </a:r>
           </a:p>
           <a:p>
@@ -6792,7 +6809,7 @@
                 </a:solidFill>
                 <a:latin typeface="Courier New"/>
               </a:rPr>
-              <a:t>74       CHILE    719,291,110  74,332,392</a:t>
+              <a:t>74031100  CHILE    715,897,592  73,977,447</a:t>
             </a:r>
           </a:p>
           <a:p>
@@ -6808,7 +6825,7 @@
                 </a:solidFill>
                 <a:latin typeface="Courier New"/>
               </a:rPr>
-              <a:t>74       CANADA   288,797,724  29,299,850</a:t>
+              <a:t>74031100  CANADA   118,144,886  11,854,813</a:t>
             </a:r>
           </a:p>
           <a:p>
@@ -6824,7 +6841,7 @@
                 </a:solidFill>
                 <a:latin typeface="Courier New"/>
               </a:rPr>
-              <a:t>74       GERMANY  177,404,661  15,671,176</a:t>
+              <a:t>74031100  GERMANY   93,060,459  10,000,049</a:t>
             </a:r>
           </a:p>
           <a:p>
@@ -6840,7 +6857,7 @@
                 </a:solidFill>
                 <a:latin typeface="Courier New"/>
               </a:rPr>
-              <a:t>74       MEXICO    98,936,124  10,906,662</a:t>
+              <a:t>74081160  CANADA    78,104,444   7,467,535</a:t>
             </a:r>
           </a:p>
           <a:p>
@@ -6856,7 +6873,7 @@
                 </a:solidFill>
                 <a:latin typeface="Courier New"/>
               </a:rPr>
-              <a:t>74       PERU      91,039,306   9,003,463</a:t>
+              <a:t>74031100  PERU      50,457,615   5,317,013</a:t>
             </a:r>
           </a:p>
         </p:txBody>
@@ -6927,7 +6944,7 @@
                 </a:solidFill>
                 <a:latin typeface="Avenir Next"/>
               </a:rPr>
-              <a:t>Pulled at 10 digits, the level tariff orders are written at</a:t>
+              <a:t>Pulled at 10 digits, which nest inside the 8 tariffs name</a:t>
             </a:r>
           </a:p>
         </p:txBody>
@@ -6996,7 +7013,7 @@
         <p:spPr>
           <a:xfrm>
             <a:off x="685800" y="5897880"/>
-            <a:ext cx="10817352" cy="822960"/>
+            <a:ext cx="10817352" cy="914400"/>
           </a:xfrm>
           <a:prstGeom prst="rect">
             <a:avLst/>
@@ -7011,33 +7028,49 @@
           <a:p>
             <a:pPr algn="l">
               <a:lnSpc>
-                <a:spcPct val="112000"/>
-              </a:lnSpc>
-            </a:pPr>
-            <a:r>
-              <a:rPr sz="1700" b="0" i="0">
+                <a:spcPct val="110000"/>
+              </a:lnSpc>
+            </a:pPr>
+            <a:r>
+              <a:rPr sz="1600" b="0" i="0">
                 <a:solidFill>
                   <a:srgbClr val="6E737C"/>
                 </a:solidFill>
                 <a:latin typeface="Avenir Next"/>
               </a:rPr>
-              <a:t>Fig. 3   2017 adds up to 2,340 billion dollars against a published 2.34 trillion, and all</a:t>
+              <a:t>Fig. 3   Imports we cover, by year; the grey 2026 bar is eight months, not twelve.</a:t>
             </a:r>
           </a:p>
           <a:p>
             <a:pPr algn="l">
               <a:lnSpc>
-                <a:spcPct val="112000"/>
-              </a:lnSpc>
-            </a:pPr>
-            <a:r>
-              <a:rPr sz="1700" b="0" i="0">
+                <a:spcPct val="110000"/>
+              </a:lnSpc>
+            </a:pPr>
+            <a:r>
+              <a:rPr sz="1600" b="0" i="0">
                 <a:solidFill>
                   <a:srgbClr val="6E737C"/>
                 </a:solidFill>
                 <a:latin typeface="Avenir Next"/>
               </a:rPr>
-              <a:t>140 months reconcile against a separate total the API returns on its own.</a:t>
+              <a:t>2017 adds up to 2,340 billion dollars against a published 2.34 trillion, and all 140</a:t>
+            </a:r>
+          </a:p>
+          <a:p>
+            <a:pPr algn="l">
+              <a:lnSpc>
+                <a:spcPct val="110000"/>
+              </a:lnSpc>
+            </a:pPr>
+            <a:r>
+              <a:rPr sz="1600" b="0" i="0">
+                <a:solidFill>
+                  <a:srgbClr val="6E737C"/>
+                </a:solidFill>
+                <a:latin typeface="Avenir Next"/>
+              </a:rPr>
+              <a:t>months reconcile against a separate total the API returns on its own.</a:t>
             </a:r>
           </a:p>
         </p:txBody>
@@ -7231,7 +7264,23 @@
                 </a:solidFill>
                 <a:latin typeface="Avenir Next"/>
               </a:rPr>
-              <a:t>Fig. 4   Each chapter measured against its own normal range, built only from data before 2025.</a:t>
+              <a:t>Fig. 4   We built a detector for unusual months. Each product chapter is measured</a:t>
+            </a:r>
+          </a:p>
+          <a:p>
+            <a:pPr algn="l">
+              <a:lnSpc>
+                <a:spcPct val="112000"/>
+              </a:lnSpc>
+            </a:pPr>
+            <a:r>
+              <a:rPr sz="1700" b="0" i="0">
+                <a:solidFill>
+                  <a:srgbClr val="6E737C"/>
+                </a:solidFill>
+                <a:latin typeface="Avenir Next"/>
+              </a:rPr>
+              <a:t>against its own normal range, built only from data before 2025 [6].</a:t>
             </a:r>
           </a:p>
         </p:txBody>
@@ -7441,7 +7490,23 @@
                 </a:solidFill>
                 <a:latin typeface="Avenir Next"/>
               </a:rPr>
-              <a:t>Published work measures these at HS-8 to HS-10 [1]. Coarser data shrinks estimates [2].</a:t>
+              <a:t>Published work measures these at the 8 to 10 digit level [1]. Coarser data shrinks</a:t>
+            </a:r>
+          </a:p>
+          <a:p>
+            <a:pPr algn="l">
+              <a:lnSpc>
+                <a:spcPct val="112000"/>
+              </a:lnSpc>
+            </a:pPr>
+            <a:r>
+              <a:rPr sz="1700" b="0" i="0">
+                <a:solidFill>
+                  <a:srgbClr val="6E737C"/>
+                </a:solidFill>
+                <a:latin typeface="Avenir Next"/>
+              </a:rPr>
+              <a:t>estimates [2][3].</a:t>
             </a:r>
           </a:p>
         </p:txBody>
@@ -7640,7 +7705,7 @@
         </p:nvSpPr>
         <p:spPr>
           <a:xfrm>
-            <a:off x="822960" y="1920240"/>
+            <a:off x="822960" y="1572768"/>
             <a:ext cx="10360152" cy="731520"/>
           </a:xfrm>
           <a:prstGeom prst="rect">
@@ -7660,7 +7725,7 @@
               </a:lnSpc>
             </a:pPr>
             <a:r>
-              <a:rPr sz="1700" b="1" i="0">
+              <a:rPr sz="1600" b="1" i="0">
                 <a:solidFill>
                   <a:srgbClr val="14161A"/>
                 </a:solidFill>
@@ -7679,7 +7744,7 @@
         </p:nvSpPr>
         <p:spPr>
           <a:xfrm>
-            <a:off x="822960" y="2377440"/>
+            <a:off x="822960" y="1938528"/>
             <a:ext cx="10360152" cy="731520"/>
           </a:xfrm>
           <a:prstGeom prst="rect">
@@ -7699,7 +7764,7 @@
               </a:lnSpc>
             </a:pPr>
             <a:r>
-              <a:rPr sz="1700" b="0" i="0">
+              <a:rPr sz="1600" b="0" i="0">
                 <a:solidFill>
                   <a:srgbClr val="6E737C"/>
                 </a:solidFill>
@@ -7718,7 +7783,7 @@
         </p:nvSpPr>
         <p:spPr>
           <a:xfrm>
-            <a:off x="822960" y="2834640"/>
+            <a:off x="822960" y="2304288"/>
             <a:ext cx="10360152" cy="731520"/>
           </a:xfrm>
           <a:prstGeom prst="rect">
@@ -7738,13 +7803,13 @@
               </a:lnSpc>
             </a:pPr>
             <a:r>
-              <a:rPr sz="1700" b="1" i="0">
+              <a:rPr sz="1600" b="1" i="0">
                 <a:solidFill>
                   <a:srgbClr val="14161A"/>
                 </a:solidFill>
                 <a:latin typeface="Avenir Next"/>
               </a:rPr>
-              <a:t>A detector, and its limits</a:t>
+              <a:t>A detector, and its limit</a:t>
             </a:r>
           </a:p>
         </p:txBody>
@@ -7757,7 +7822,7 @@
         </p:nvSpPr>
         <p:spPr>
           <a:xfrm>
-            <a:off x="822960" y="3291840"/>
+            <a:off x="822960" y="2670048"/>
             <a:ext cx="10360152" cy="731520"/>
           </a:xfrm>
           <a:prstGeom prst="rect">
@@ -7777,7 +7842,7 @@
               </a:lnSpc>
             </a:pPr>
             <a:r>
-              <a:rPr sz="1700" b="0" i="0">
+              <a:rPr sz="1600" b="0" i="0">
                 <a:solidFill>
                   <a:srgbClr val="6E737C"/>
                 </a:solidFill>
@@ -7796,7 +7861,7 @@
         </p:nvSpPr>
         <p:spPr>
           <a:xfrm>
-            <a:off x="822960" y="3749039"/>
+            <a:off x="822960" y="3035808"/>
             <a:ext cx="10360152" cy="731520"/>
           </a:xfrm>
           <a:prstGeom prst="rect">
@@ -7816,7 +7881,7 @@
               </a:lnSpc>
             </a:pPr>
             <a:r>
-              <a:rPr sz="1700" b="1" i="0">
+              <a:rPr sz="1600" b="1" i="0">
                 <a:solidFill>
                   <a:srgbClr val="14161A"/>
                 </a:solidFill>
@@ -7835,7 +7900,7 @@
         </p:nvSpPr>
         <p:spPr>
           <a:xfrm>
-            <a:off x="822960" y="4206240"/>
+            <a:off x="822960" y="3401568"/>
             <a:ext cx="10360152" cy="731520"/>
           </a:xfrm>
           <a:prstGeom prst="rect">
@@ -7855,13 +7920,13 @@
               </a:lnSpc>
             </a:pPr>
             <a:r>
-              <a:rPr sz="1700" b="0" i="0">
+              <a:rPr sz="1600" b="0" i="0">
                 <a:solidFill>
                   <a:srgbClr val="6E737C"/>
                 </a:solidFill>
                 <a:latin typeface="Avenir Next"/>
               </a:rPr>
-              <a:t>Corrected dates, and the 8-digit product lists.</a:t>
+              <a:t>Start dates re-read from the order texts, plus the 8-digit product lists.</a:t>
             </a:r>
           </a:p>
         </p:txBody>
@@ -7874,7 +7939,7 @@
         </p:nvSpPr>
         <p:spPr>
           <a:xfrm>
-            <a:off x="822960" y="4663440"/>
+            <a:off x="822960" y="3767328"/>
             <a:ext cx="10360152" cy="731520"/>
           </a:xfrm>
           <a:prstGeom prst="rect">
@@ -7894,13 +7959,13 @@
               </a:lnSpc>
             </a:pPr>
             <a:r>
-              <a:rPr sz="1700" b="1" i="0">
+              <a:rPr sz="1600" b="1" i="0">
                 <a:solidFill>
                   <a:srgbClr val="14161A"/>
                 </a:solidFill>
                 <a:latin typeface="Avenir Next"/>
               </a:rPr>
-              <a:t>How we will measure it</a:t>
+              <a:t>How we will measure it, and fix that limit</a:t>
             </a:r>
           </a:p>
         </p:txBody>
@@ -7913,7 +7978,7 @@
         </p:nvSpPr>
         <p:spPr>
           <a:xfrm>
-            <a:off x="822960" y="5120640"/>
+            <a:off x="822960" y="4133088"/>
             <a:ext cx="10360152" cy="731520"/>
           </a:xfrm>
           <a:prstGeom prst="rect">
@@ -7933,13 +7998,13 @@
               </a:lnSpc>
             </a:pPr>
             <a:r>
-              <a:rPr sz="1700" b="0" i="0">
+              <a:rPr sz="1600" b="0" i="0">
                 <a:solidFill>
                   <a:srgbClr val="6E737C"/>
                 </a:solidFill>
                 <a:latin typeface="Avenir Next"/>
               </a:rPr>
-              <a:t>Within product, across origins.</a:t>
+              <a:t>One product across origins: a price shock moves them all, a tariff moves one.</a:t>
             </a:r>
           </a:p>
         </p:txBody>
@@ -7952,7 +8017,7 @@
         </p:nvSpPr>
         <p:spPr>
           <a:xfrm>
-            <a:off x="822960" y="5577840"/>
+            <a:off x="822960" y="4498848"/>
             <a:ext cx="10360152" cy="731520"/>
           </a:xfrm>
           <a:prstGeom prst="rect">
@@ -7972,7 +8037,7 @@
               </a:lnSpc>
             </a:pPr>
             <a:r>
-              <a:rPr sz="1700" b="1" i="0">
+              <a:rPr sz="1600" b="1" i="0">
                 <a:solidFill>
                   <a:srgbClr val="14161A"/>
                 </a:solidFill>
@@ -7991,7 +8056,7 @@
         </p:nvSpPr>
         <p:spPr>
           <a:xfrm>
-            <a:off x="822960" y="6035040"/>
+            <a:off x="822960" y="4864608"/>
             <a:ext cx="10360152" cy="731520"/>
           </a:xfrm>
           <a:prstGeom prst="rect">
@@ -8011,13 +8076,91 @@
               </a:lnSpc>
             </a:pPr>
             <a:r>
-              <a:rPr sz="1700" b="0" i="0">
+              <a:rPr sz="1600" b="0" i="0">
                 <a:solidFill>
                   <a:srgbClr val="6E737C"/>
                 </a:solidFill>
                 <a:latin typeface="Avenir Next"/>
               </a:rPr>
               <a:t>Every estimate against a placebo. Three methods have already failed it.</a:t>
+            </a:r>
+          </a:p>
+        </p:txBody>
+      </p:sp>
+      <p:sp>
+        <p:nvSpPr>
+          <p:cNvPr id="16" name="TextBox 15"/>
+          <p:cNvSpPr txBox="1"/>
+          <p:nvPr/>
+        </p:nvSpPr>
+        <p:spPr>
+          <a:xfrm>
+            <a:off x="822960" y="5230368"/>
+            <a:ext cx="10360152" cy="731520"/>
+          </a:xfrm>
+          <a:prstGeom prst="rect">
+            <a:avLst/>
+          </a:prstGeom>
+          <a:noFill/>
+        </p:spPr>
+        <p:txBody>
+          <a:bodyPr wrap="square">
+            <a:spAutoFit/>
+          </a:bodyPr>
+          <a:lstStyle/>
+          <a:p>
+            <a:pPr algn="l">
+              <a:lnSpc>
+                <a:spcPct val="115000"/>
+              </a:lnSpc>
+            </a:pPr>
+            <a:r>
+              <a:rPr sz="1600" b="1" i="0">
+                <a:solidFill>
+                  <a:srgbClr val="14161A"/>
+                </a:solidFill>
+                <a:latin typeface="Avenir Next"/>
+              </a:rPr>
+              <a:t>Next</a:t>
+            </a:r>
+          </a:p>
+        </p:txBody>
+      </p:sp>
+      <p:sp>
+        <p:nvSpPr>
+          <p:cNvPr id="17" name="TextBox 16"/>
+          <p:cNvSpPr txBox="1"/>
+          <p:nvPr/>
+        </p:nvSpPr>
+        <p:spPr>
+          <a:xfrm>
+            <a:off x="822960" y="5596128"/>
+            <a:ext cx="10360152" cy="731520"/>
+          </a:xfrm>
+          <a:prstGeom prst="rect">
+            <a:avLst/>
+          </a:prstGeom>
+          <a:noFill/>
+        </p:spPr>
+        <p:txBody>
+          <a:bodyPr wrap="square">
+            <a:spAutoFit/>
+          </a:bodyPr>
+          <a:lstStyle/>
+          <a:p>
+            <a:pPr algn="l">
+              <a:lnSpc>
+                <a:spcPct val="115000"/>
+              </a:lnSpc>
+            </a:pPr>
+            <a:r>
+              <a:rPr sz="1600" b="0" i="0">
+                <a:solidFill>
+                  <a:srgbClr val="6E737C"/>
+                </a:solidFill>
+                <a:latin typeface="Avenir Next"/>
+              </a:rPr>
+              <a:t>Question 1 first, then questions 2 and 3 for the final report.</a:t>
             </a:r>
           </a:p>
         </p:txBody>
@@ -8227,7 +8370,7 @@
                 </a:solidFill>
                 <a:latin typeface="Avenir Next"/>
               </a:rPr>
-              <a:t>Median gap from announcement to start date is 8 days.</a:t>
+              <a:t>Median gap from announcement to start date is about 9 days.</a:t>
             </a:r>
           </a:p>
         </p:txBody>

--- a/slides/Mandadi_Khalsa_Presentation1.pptx
+++ b/slides/Mandadi_Khalsa_Presentation1.pptx
@@ -839,13 +839,25 @@
           <a:p/>
           <a:p>
             <a:r>
-              <a:t>That gap creates an obvious incentive: get your goods in before the tax starts. Importers rush, and you can see it in the copper line climbing before the date.</a:t>
+              <a:t>That gap creates an obvious incentive: get your goods in before the tax starts.</a:t>
             </a:r>
           </a:p>
           <a:p/>
           <a:p>
             <a:r>
-              <a:t>Afterwards imports usually fall below normal, because buyers already stocked up.</a:t>
+              <a:t>POINT AT THE CHART AND BE ACCURATE ABOUT IT. The rush does not wait for the announcement. Copper runs 1.25 billion in February and 3.22 in July, the month it was announced, because a Section 232 copper investigation was public long before the proclamation. The announcement-to-start gap here is three weeks; the build-up is five months. So the thing that starts the rush is the tariff becoming likely, not becoming official. That is part of why question 1 is worth asking.</a:t>
+            </a:r>
+          </a:p>
+          <a:p/>
+          <a:p>
+            <a:r>
+              <a:t>Then August falls to 1.74 and November to 1.06, because buyers already stocked up.</a:t>
+            </a:r>
+          </a:p>
+          <a:p/>
+          <a:p>
+            <a:r>
+              <a:t>DO NOT OVERSELL THE DIP. The line comes back up from December. Eighteen months of copper is one product and one event, and it is on this slide to explain the idea, not to prove anything. The measurement is slides 6 to 8.</a:t>
             </a:r>
           </a:p>
           <a:p/>
@@ -5859,7 +5871,7 @@
                 </a:solidFill>
                 <a:latin typeface="Avenir Next"/>
               </a:rPr>
-              <a:t>Fig. 1   Copper imports. A duty is announced, then starts later.</a:t>
+              <a:t>Fig. 1   Copper imports. Announced July 2025, in force from August.</a:t>
             </a:r>
           </a:p>
           <a:p>
@@ -5875,7 +5887,7 @@
                 </a:solidFill>
                 <a:latin typeface="Avenir Next"/>
               </a:rPr>
-              <a:t>That gap is a window to import before the duty applies. Goods pulled into it are</a:t>
+              <a:t>Imports had been climbing since February, because the duty was expected.</a:t>
             </a:r>
           </a:p>
           <a:p>
@@ -5891,7 +5903,7 @@
                 </a:solidFill>
                 <a:latin typeface="Avenir Next"/>
               </a:rPr>
-              <a:t>borrowed from later months, which is the question in our title [5].</a:t>
+              <a:t>Goods pulled forward are borrowed from later months, the question in our title [5].</a:t>
             </a:r>
           </a:p>
         </p:txBody>
@@ -7432,8 +7444,8 @@
         </p:blipFill>
         <p:spPr>
           <a:xfrm>
-            <a:off x="1894115" y="1874519"/>
-            <a:ext cx="8403464" cy="3822191"/>
+            <a:off x="1891882" y="1874519"/>
+            <a:ext cx="8407929" cy="3822192"/>
           </a:xfrm>
           <a:prstGeom prst="rect">
             <a:avLst/>
@@ -7642,15 +7654,50 @@
           </a:p>
         </p:txBody>
       </p:sp>
-      <p:sp>
-        <p:nvSpPr>
-          <p:cNvPr id="5" name="TextBox 4"/>
+      <p:cxnSp>
+        <p:nvCxnSpPr>
+          <p:cNvPr id="5" name="Connector 4"/>
+          <p:cNvCxnSpPr/>
+          <p:nvPr/>
+        </p:nvCxnSpPr>
+        <p:spPr>
+          <a:xfrm>
+            <a:off x="685800" y="6035040"/>
+            <a:ext cx="10817352" cy="0"/>
+          </a:xfrm>
+          <a:prstGeom prst="line">
+            <a:avLst/>
+          </a:prstGeom>
+          <a:ln w="9525">
+            <a:solidFill>
+              <a:srgbClr val="6E737C"/>
+            </a:solidFill>
+          </a:ln>
+        </p:spPr>
+        <p:style>
+          <a:lnRef idx="2">
+            <a:schemeClr val="accent1"/>
+          </a:lnRef>
+          <a:fillRef idx="0">
+            <a:schemeClr val="accent1"/>
+          </a:fillRef>
+          <a:effectRef idx="1">
+            <a:schemeClr val="accent1"/>
+          </a:effectRef>
+          <a:fontRef idx="minor">
+            <a:schemeClr val="tx1"/>
+          </a:fontRef>
+        </p:style>
+      </p:cxnSp>
+      <p:sp>
+        <p:nvSpPr>
+          <p:cNvPr id="6" name="TextBox 5"/>
           <p:cNvSpPr txBox="1"/>
           <p:nvPr/>
         </p:nvSpPr>
         <p:spPr>
           <a:xfrm>
-            <a:off x="685800" y="5897880"/>
+            <a:off x="685800" y="6163056"/>
             <a:ext cx="10817352" cy="685800"/>
           </a:xfrm>
           <a:prstGeom prst="rect">
@@ -7699,13 +7746,13 @@
       </p:sp>
       <p:sp>
         <p:nvSpPr>
-          <p:cNvPr id="6" name="TextBox 5"/>
+          <p:cNvPr id="7" name="TextBox 6"/>
           <p:cNvSpPr txBox="1"/>
           <p:nvPr/>
         </p:nvSpPr>
         <p:spPr>
           <a:xfrm>
-            <a:off x="822960" y="1572768"/>
+            <a:off x="822960" y="1700784"/>
             <a:ext cx="10360152" cy="731520"/>
           </a:xfrm>
           <a:prstGeom prst="rect">
@@ -7738,13 +7785,13 @@
       </p:sp>
       <p:sp>
         <p:nvSpPr>
-          <p:cNvPr id="7" name="TextBox 6"/>
+          <p:cNvPr id="8" name="TextBox 7"/>
           <p:cNvSpPr txBox="1"/>
           <p:nvPr/>
         </p:nvSpPr>
         <p:spPr>
           <a:xfrm>
-            <a:off x="822960" y="1938528"/>
+            <a:off x="822960" y="2066544"/>
             <a:ext cx="10360152" cy="731520"/>
           </a:xfrm>
           <a:prstGeom prst="rect">
@@ -7777,13 +7824,13 @@
       </p:sp>
       <p:sp>
         <p:nvSpPr>
-          <p:cNvPr id="8" name="TextBox 7"/>
+          <p:cNvPr id="9" name="TextBox 8"/>
           <p:cNvSpPr txBox="1"/>
           <p:nvPr/>
         </p:nvSpPr>
         <p:spPr>
           <a:xfrm>
-            <a:off x="822960" y="2304288"/>
+            <a:off x="822960" y="2432304"/>
             <a:ext cx="10360152" cy="731520"/>
           </a:xfrm>
           <a:prstGeom prst="rect">
@@ -7816,13 +7863,13 @@
       </p:sp>
       <p:sp>
         <p:nvSpPr>
-          <p:cNvPr id="9" name="TextBox 8"/>
+          <p:cNvPr id="10" name="TextBox 9"/>
           <p:cNvSpPr txBox="1"/>
           <p:nvPr/>
         </p:nvSpPr>
         <p:spPr>
           <a:xfrm>
-            <a:off x="822960" y="2670048"/>
+            <a:off x="822960" y="2798064"/>
             <a:ext cx="10360152" cy="731520"/>
           </a:xfrm>
           <a:prstGeom prst="rect">
@@ -7855,13 +7902,13 @@
       </p:sp>
       <p:sp>
         <p:nvSpPr>
-          <p:cNvPr id="10" name="TextBox 9"/>
+          <p:cNvPr id="11" name="TextBox 10"/>
           <p:cNvSpPr txBox="1"/>
           <p:nvPr/>
         </p:nvSpPr>
         <p:spPr>
           <a:xfrm>
-            <a:off x="822960" y="3035808"/>
+            <a:off x="822960" y="3163824"/>
             <a:ext cx="10360152" cy="731520"/>
           </a:xfrm>
           <a:prstGeom prst="rect">
@@ -7894,13 +7941,13 @@
       </p:sp>
       <p:sp>
         <p:nvSpPr>
-          <p:cNvPr id="11" name="TextBox 10"/>
+          <p:cNvPr id="12" name="TextBox 11"/>
           <p:cNvSpPr txBox="1"/>
           <p:nvPr/>
         </p:nvSpPr>
         <p:spPr>
           <a:xfrm>
-            <a:off x="822960" y="3401568"/>
+            <a:off x="822960" y="3529584"/>
             <a:ext cx="10360152" cy="731520"/>
           </a:xfrm>
           <a:prstGeom prst="rect">
@@ -7933,13 +7980,13 @@
       </p:sp>
       <p:sp>
         <p:nvSpPr>
-          <p:cNvPr id="12" name="TextBox 11"/>
+          <p:cNvPr id="13" name="TextBox 12"/>
           <p:cNvSpPr txBox="1"/>
           <p:nvPr/>
         </p:nvSpPr>
         <p:spPr>
           <a:xfrm>
-            <a:off x="822960" y="3767328"/>
+            <a:off x="822960" y="3895344"/>
             <a:ext cx="10360152" cy="731520"/>
           </a:xfrm>
           <a:prstGeom prst="rect">
@@ -7972,13 +8019,13 @@
       </p:sp>
       <p:sp>
         <p:nvSpPr>
-          <p:cNvPr id="13" name="TextBox 12"/>
+          <p:cNvPr id="14" name="TextBox 13"/>
           <p:cNvSpPr txBox="1"/>
           <p:nvPr/>
         </p:nvSpPr>
         <p:spPr>
           <a:xfrm>
-            <a:off x="822960" y="4133088"/>
+            <a:off x="822960" y="4261104"/>
             <a:ext cx="10360152" cy="731520"/>
           </a:xfrm>
           <a:prstGeom prst="rect">
@@ -8011,13 +8058,13 @@
       </p:sp>
       <p:sp>
         <p:nvSpPr>
-          <p:cNvPr id="14" name="TextBox 13"/>
+          <p:cNvPr id="15" name="TextBox 14"/>
           <p:cNvSpPr txBox="1"/>
           <p:nvPr/>
         </p:nvSpPr>
         <p:spPr>
           <a:xfrm>
-            <a:off x="822960" y="4498848"/>
+            <a:off x="822960" y="4626864"/>
             <a:ext cx="10360152" cy="731520"/>
           </a:xfrm>
           <a:prstGeom prst="rect">
@@ -8050,13 +8097,13 @@
       </p:sp>
       <p:sp>
         <p:nvSpPr>
-          <p:cNvPr id="15" name="TextBox 14"/>
+          <p:cNvPr id="16" name="TextBox 15"/>
           <p:cNvSpPr txBox="1"/>
           <p:nvPr/>
         </p:nvSpPr>
         <p:spPr>
           <a:xfrm>
-            <a:off x="822960" y="4864608"/>
+            <a:off x="822960" y="4992624"/>
             <a:ext cx="10360152" cy="731520"/>
           </a:xfrm>
           <a:prstGeom prst="rect">
@@ -8089,13 +8136,13 @@
       </p:sp>
       <p:sp>
         <p:nvSpPr>
-          <p:cNvPr id="16" name="TextBox 15"/>
+          <p:cNvPr id="17" name="TextBox 16"/>
           <p:cNvSpPr txBox="1"/>
           <p:nvPr/>
         </p:nvSpPr>
         <p:spPr>
           <a:xfrm>
-            <a:off x="822960" y="5230368"/>
+            <a:off x="822960" y="5358384"/>
             <a:ext cx="10360152" cy="731520"/>
           </a:xfrm>
           <a:prstGeom prst="rect">
@@ -8128,13 +8175,13 @@
       </p:sp>
       <p:sp>
         <p:nvSpPr>
-          <p:cNvPr id="17" name="TextBox 16"/>
+          <p:cNvPr id="18" name="TextBox 17"/>
           <p:cNvSpPr txBox="1"/>
           <p:nvPr/>
         </p:nvSpPr>
         <p:spPr>
           <a:xfrm>
-            <a:off x="822960" y="5596128"/>
+            <a:off x="822960" y="5724144"/>
             <a:ext cx="10360152" cy="731520"/>
           </a:xfrm>
           <a:prstGeom prst="rect">

--- a/slides/Mandadi_Khalsa_Presentation1.pptx
+++ b/slides/Mandadi_Khalsa_Presentation1.pptx
@@ -1352,6 +1352,11 @@
           <a:p>
             <a:r>
               <a:t>-- NARRATE IT THROUGH COPPER, which they already know from slides 2, 5 and 6 --</a:t>
+            </a:r>
+          </a:p>
+          <a:p>
+            <a:r>
+              <a:t>The copper line is on the slide now, so do not just read it. Read it once, then add the part that is not up there:</a:t>
             </a:r>
           </a:p>
           <a:p>
@@ -7502,7 +7507,7 @@
                 </a:solidFill>
                 <a:latin typeface="Avenir Next"/>
               </a:rPr>
-              <a:t>Published work measures these at the 8 to 10 digit level [1]. Coarser data shrinks</a:t>
+              <a:t>Copper, for example: ten actions touch it, and seven cover under 1% of it.</a:t>
             </a:r>
           </a:p>
           <a:p>
@@ -7518,7 +7523,7 @@
                 </a:solidFill>
                 <a:latin typeface="Avenir Next"/>
               </a:rPr>
-              <a:t>estimates [2][3].</a:t>
+              <a:t>Published work measures these at 8 to 10 digits [1]; coarser data shrinks estimates [2][3].</a:t>
             </a:r>
           </a:p>
         </p:txBody>

--- a/slides/Mandadi_Khalsa_Presentation1.pptx
+++ b/slides/Mandadi_Khalsa_Presentation1.pptx
@@ -517,7 +517,12 @@
           </a:p>
           <a:p>
             <a:r>
-              <a:t>Eight slides for 10-15 minutes. Slides 2, 3 and 7 need the most time; 4 and 5 the least.</a:t>
+              <a:t>Eight slides, UNDER 10 MINUTES. Slide 7 needs the most time; 1 and 4 the least.</a:t>
+            </a:r>
+          </a:p>
+          <a:p>
+            <a:r>
+              <a:t>slides/SCRIPT.md is written to 9:15 measured. Do not ad-lib past it.</a:t>
             </a:r>
           </a:p>
           <a:p>
@@ -1339,7 +1344,13 @@
           <a:p/>
           <a:p>
             <a:r>
-              <a:t>That is exactly what happened to us. Our first attempt to measure an effect found nothing, and this is why. The null was our ruler, not the world.</a:t>
+              <a:t>That is exactly what happened to us. Our first attempt to measure an effect found nothing. The null was our ruler, not the world.</a:t>
+            </a:r>
+          </a:p>
+          <a:p/>
+          <a:p>
+            <a:r>
+              <a:t>SAY 'ONE OF THREE REASONS'. coverage/FINDINGS.md lists three causes of that null and ranks this one second. The first is that our announcement dates are mostly implementing notices, so the median official window is nine days and there is barely any anticipation period left in the data; the copper story on slide 2 is the answer to that, since the rush runs on news rather than on documents. The third is that the partner dimension was collapsed, which the across-origins design on slide 8 fixes. Dilution is the one that generalizes beyond us, which is why it is the one on the slide. Do not call it the reason.</a:t>
             </a:r>
           </a:p>
           <a:p/>

--- a/slides/Mandadi_Khalsa_Presentation1.pptx
+++ b/slides/Mandadi_Khalsa_Presentation1.pptx
@@ -512,7 +512,12 @@
           <a:lstStyle/>
           <a:p>
             <a:r>
-              <a:t>SPEAKER SPLIT: slides 1-4 one of us, 5-8 the other. Both must speak.</a:t>
+              <a:t>SPEAKER SPLIT: RAHUL takes slides 1 to 4. RAUNAK takes slides 5 to 8.</a:t>
+            </a:r>
+          </a:p>
+          <a:p>
+            <a:r>
+              <a:t>The rubric requires both of them to speak, so neither half is optional.</a:t>
             </a:r>
           </a:p>
           <a:p>
@@ -522,7 +527,7 @@
           </a:p>
           <a:p>
             <a:r>
-              <a:t>slides/SCRIPT.md is written to 9:15 measured. Do not ad-lib past it.</a:t>
+              <a:t>slides/SCRIPT.md is written to 9:03 measured, which is the whole budget. Do not ad-lib.</a:t>
             </a:r>
           </a:p>
           <a:p>
@@ -1047,6 +1052,12 @@
               <a:t>Say plainly that this presentation is the data and its limits, not answers yet.</a:t>
             </a:r>
           </a:p>
+          <a:p/>
+          <a:p>
+            <a:r>
+              <a:t>RAHUL HANDS OVER HERE. Say Raunak's name out loud so the switch is clean.</a:t>
+            </a:r>
+          </a:p>
         </p:txBody>
       </p:sp>
       <p:sp>
@@ -1114,7 +1125,7 @@
           <a:lstStyle/>
           <a:p>
             <a:r>
-              <a:t>THE DATA. Two things on this slide, go left then right.</a:t>
+              <a:t>THE DATA. RAUNAK STARTS HERE. Two things on this slide, go left then right.</a:t>
             </a:r>
           </a:p>
           <a:p/>

--- a/slides/Mandadi_Khalsa_Presentation1.pptx
+++ b/slides/Mandadi_Khalsa_Presentation1.pptx
@@ -512,6 +512,160 @@
           <a:lstStyle/>
           <a:p>
             <a:r>
+              <a:t>RAHUL   |   this slide 0:29   |   clock at end 0:29</a:t>
+            </a:r>
+          </a:p>
+          <a:p>
+            <a:r>
+              <a:t>==========================================================</a:t>
+            </a:r>
+          </a:p>
+          <a:p>
+            <a:r>
+              <a:t>SAY THIS:</a:t>
+            </a:r>
+          </a:p>
+          <a:p/>
+          <a:p>
+            <a:r>
+              <a:t>Hi everyone. I'm Rahul, this is Raunak, and our project is called Borrowed or Real.</a:t>
+            </a:r>
+          </a:p>
+          <a:p/>
+          <a:p>
+            <a:r>
+              <a:t>It's about what happens to imports when the US announces a tariff. The question is in the title.</a:t>
+            </a:r>
+          </a:p>
+          <a:p>
+            <a:r>
+              <a:t>Imports drop after a tariff starts, and we want to know whether the goods just arrived early, or</a:t>
+            </a:r>
+          </a:p>
+          <a:p>
+            <a:r>
+              <a:t>whether the business left for good.</a:t>
+            </a:r>
+          </a:p>
+          <a:p/>
+          <a:p>
+            <a:r>
+              <a:t>I'll take the first four slides.</a:t>
+            </a:r>
+          </a:p>
+          <a:p/>
+          <a:p>
+            <a:r>
+              <a:t>==========================================================</a:t>
+            </a:r>
+          </a:p>
+          <a:p>
+            <a:r>
+              <a:t>HOW TO SAY IT: Look up, not at the screen. Nobody needs the slide for this bit.</a:t>
+            </a:r>
+          </a:p>
+          <a:p/>
+          <a:p>
+            <a:r>
+              <a:t>==========================================================</a:t>
+            </a:r>
+          </a:p>
+          <a:p>
+            <a:r>
+              <a:t>NOT SPOKEN. Only if someone asks:</a:t>
+            </a:r>
+          </a:p>
+          <a:p/>
+          <a:p>
+            <a:r>
+              <a:t>Q: So is there a rush?</a:t>
+            </a:r>
+          </a:p>
+          <a:p>
+            <a:r>
+              <a:t>A: We have the data and the product level matching to answer it now. The product group version of the question was unanswerable, for the reason on slide 7.</a:t>
+            </a:r>
+          </a:p>
+          <a:p/>
+          <a:p>
+            <a:r>
+              <a:t>Q: Who exactly is the customer?</a:t>
+            </a:r>
+          </a:p>
+          <a:p>
+            <a:r>
+              <a:t>A: Whoever is exposed to one country rather than to total volume: an importer requalifying a supplier, a lender behind either side, a carrier running that route. We are still testing which the data serves best. An earlier version of this project named port and terminal operators; we tested that and dropped it, because displaced volume arrives from a different country through much the same US customs districts.</a:t>
+            </a:r>
+          </a:p>
+          <a:p/>
+          <a:p>
+            <a:r>
+              <a:t>Q: Five percent of what, exactly?</a:t>
+            </a:r>
+          </a:p>
+          <a:p>
+            <a:r>
+              <a:t>A: The median over 1,350 action and product group pairs. Per action the median is 1.3 percent, so the slide is the conservative version.</a:t>
+            </a:r>
+          </a:p>
+          <a:p/>
+          <a:p>
+            <a:r>
+              <a:t>Q: What were the other two reasons?</a:t>
+            </a:r>
+          </a:p>
+          <a:p>
+            <a:r>
+              <a:t>A: Our announcement dates are mostly implementing notices, so the median official window is nine days and there is almost no anticipation period left in the data. That is what the copper story answers: the rush runs on news, not on documents. And the partner dimension was collapsed, which the across-origins design fixes.</a:t>
+            </a:r>
+          </a:p>
+          <a:p/>
+          <a:p>
+            <a:r>
+              <a:t>Q: Your copper chart recovers, so what is the problem?</a:t>
+            </a:r>
+          </a:p>
+          <a:p>
+            <a:r>
+              <a:t>A: Correct, and we are not claiming copper proves anything. In tonnage it goes 293 thousand tonnes in July 2025, down to 93 thousand in November, back to 245 thousand by August 2026. One product, one event. It is on slide 2 to explain front-loading.</a:t>
+            </a:r>
+          </a:p>
+          <a:p/>
+          <a:p>
+            <a:r>
+              <a:t>Q: Why not just watch the data and react?</a:t>
+            </a:r>
+          </a:p>
+          <a:p>
+            <a:r>
+              <a:t>A: That is slide 3. The first usable data lands about five weeks after the month closes, and the decision is on announcement day.</a:t>
+            </a:r>
+          </a:p>
+          <a:p/>
+          <a:p>
+            <a:r>
+              <a:t>Q: What is your data science problem, in technical terms?</a:t>
+            </a:r>
+          </a:p>
+          <a:p>
+            <a:r>
+              <a:t>A: Classification for whether a surge occurs, regression for how large, and duration analysis with right-censoring for how long the aftermath lasts.</a:t>
+            </a:r>
+          </a:p>
+          <a:p/>
+          <a:p>
+            <a:r>
+              <a:t>==========================================================</a:t>
+            </a:r>
+          </a:p>
+          <a:p>
+            <a:r>
+              <a:t>BACKGROUND, not for saying out loud:</a:t>
+            </a:r>
+          </a:p>
+          <a:p/>
+          <a:p>
+            <a:r>
               <a:t>SPEAKER SPLIT: RAHUL takes slides 1 to 4. RAUNAK takes slides 5 to 8.</a:t>
             </a:r>
           </a:p>
@@ -837,6 +991,115 @@
           <a:lstStyle/>
           <a:p>
             <a:r>
+              <a:t>RAHUL   |   this slide 1:04   |   clock at end 1:33</a:t>
+            </a:r>
+          </a:p>
+          <a:p>
+            <a:r>
+              <a:t>==========================================================</a:t>
+            </a:r>
+          </a:p>
+          <a:p>
+            <a:r>
+              <a:t>SAY THIS:</a:t>
+            </a:r>
+          </a:p>
+          <a:p/>
+          <a:p>
+            <a:r>
+              <a:t>So, tariffs don't happen overnight. They get announced, and they take effect on a named date</a:t>
+            </a:r>
+          </a:p>
+          <a:p>
+            <a:r>
+              <a:t>later.</a:t>
+            </a:r>
+          </a:p>
+          <a:p/>
+          <a:p>
+            <a:r>
+              <a:t>Figure 1 is monthly copper imports, in dollars. Here's July 2025, when a fifty percent duty was</a:t>
+            </a:r>
+          </a:p>
+          <a:p>
+            <a:r>
+              <a:t>announced. Here's August, when it started. Three weeks apart.</a:t>
+            </a:r>
+          </a:p>
+          <a:p/>
+          <a:p>
+            <a:r>
+              <a:t>But look at what the line does. It doesn't wait for July. It starts climbing in February and nearly</a:t>
+            </a:r>
+          </a:p>
+          <a:p>
+            <a:r>
+              <a:t>triples by the announcement, because the investigation behind that tariff was public months</a:t>
+            </a:r>
+          </a:p>
+          <a:p>
+            <a:r>
+              <a:t>earlier. Everyone in the industry could see it coming.</a:t>
+            </a:r>
+          </a:p>
+          <a:p/>
+          <a:p>
+            <a:r>
+              <a:t>So the rush doesn't start when a tariff becomes official. It starts when it becomes likely.</a:t>
+            </a:r>
+          </a:p>
+          <a:p/>
+          <a:p>
+            <a:r>
+              <a:t>Then August, and it drops hard.</a:t>
+            </a:r>
+          </a:p>
+          <a:p/>
+          <a:p>
+            <a:r>
+              <a:t>That's front-loading. Goods that would have arrived in October came in in June instead. Nothing got</a:t>
+            </a:r>
+          </a:p>
+          <a:p>
+            <a:r>
+              <a:t>created, it just moved forward in time. We call that borrowed, because the later months pay it</a:t>
+            </a:r>
+          </a:p>
+          <a:p>
+            <a:r>
+              <a:t>back.</a:t>
+            </a:r>
+          </a:p>
+          <a:p/>
+          <a:p>
+            <a:r>
+              <a:t>==========================================================</a:t>
+            </a:r>
+          </a:p>
+          <a:p>
+            <a:r>
+              <a:t>HOW TO SAY IT: Point at the two red dashed lines when you name July and August, then sweep back along the</a:t>
+            </a:r>
+          </a:p>
+          <a:p>
+            <a:r>
+              <a:t>climb when you say February. The sweep is the whole point of the slide.</a:t>
+            </a:r>
+          </a:p>
+          <a:p/>
+          <a:p>
+            <a:r>
+              <a:t>==========================================================</a:t>
+            </a:r>
+          </a:p>
+          <a:p>
+            <a:r>
+              <a:t>BACKGROUND, not for saying out loud:</a:t>
+            </a:r>
+          </a:p>
+          <a:p/>
+          <a:p>
+            <a:r>
               <a:t>LAYMAN CONTEXT. Assume nobody knows what a tariff is.</a:t>
             </a:r>
           </a:p>
@@ -949,6 +1212,116 @@
           <a:lstStyle/>
           <a:p>
             <a:r>
+              <a:t>RAHUL   |   this slide 1:03   |   clock at end 2:37</a:t>
+            </a:r>
+          </a:p>
+          <a:p>
+            <a:r>
+              <a:t>==========================================================</a:t>
+            </a:r>
+          </a:p>
+          <a:p>
+            <a:r>
+              <a:t>SAY THIS:</a:t>
+            </a:r>
+          </a:p>
+          <a:p/>
+          <a:p>
+            <a:r>
+              <a:t>So why does this matter?</a:t>
+            </a:r>
+          </a:p>
+          <a:p/>
+          <a:p>
+            <a:r>
+              <a:t>Because somebody has to make an expensive decision on announcement day, and the data they'd need</a:t>
+            </a:r>
+          </a:p>
+          <a:p>
+            <a:r>
+              <a:t>doesn't exist yet.</a:t>
+            </a:r>
+          </a:p>
+          <a:p/>
+          <a:p>
+            <a:r>
+              <a:t>Figure 2 is that problem. Day zero, the tariff gets announced. If you're importing from the country</a:t>
+            </a:r>
+          </a:p>
+          <a:p>
+            <a:r>
+              <a:t>that just got hit, you have a decision. Wait it out, or go find a new supplier? Requalifying takes</a:t>
+            </a:r>
+          </a:p>
+          <a:p>
+            <a:r>
+              <a:t>months and real money. A lender behind that trade and a carrier running that route face the same</a:t>
+            </a:r>
+          </a:p>
+          <a:p>
+            <a:r>
+              <a:t>question.</a:t>
+            </a:r>
+          </a:p>
+          <a:p/>
+          <a:p>
+            <a:r>
+              <a:t>Day thirty, the duty takes effect.</a:t>
+            </a:r>
+          </a:p>
+          <a:p/>
+          <a:p>
+            <a:r>
+              <a:t>Day sixty-five is the first time official data shows what happened, because Census publishes about</a:t>
+            </a:r>
+          </a:p>
+          <a:p>
+            <a:r>
+              <a:t>five weeks after the month closes.</a:t>
+            </a:r>
+          </a:p>
+          <a:p/>
+          <a:p>
+            <a:r>
+              <a:t>So by the time you've seen two bad months, the tariff's been in force a quarter, and every one of</a:t>
+            </a:r>
+          </a:p>
+          <a:p>
+            <a:r>
+              <a:t>those decisions is already made.</a:t>
+            </a:r>
+          </a:p>
+          <a:p/>
+          <a:p>
+            <a:r>
+              <a:t>That's the gap we're trying to close.</a:t>
+            </a:r>
+          </a:p>
+          <a:p/>
+          <a:p>
+            <a:r>
+              <a:t>==========================================================</a:t>
+            </a:r>
+          </a:p>
+          <a:p>
+            <a:r>
+              <a:t>HOW TO SAY IT: Walk the three dots left to right as you name them. Pause on day sixty-five.</a:t>
+            </a:r>
+          </a:p>
+          <a:p/>
+          <a:p>
+            <a:r>
+              <a:t>==========================================================</a:t>
+            </a:r>
+          </a:p>
+          <a:p>
+            <a:r>
+              <a:t>BACKGROUND, not for saying out loud:</a:t>
+            </a:r>
+          </a:p>
+          <a:p/>
+          <a:p>
+            <a:r>
               <a:t>THE DOMAIN PROBLEM. This slide says why anyone should care.</a:t>
             </a:r>
           </a:p>
@@ -1037,6 +1410,100 @@
           <a:lstStyle/>
           <a:p>
             <a:r>
+              <a:t>RAHUL   |   this slide 0:51   |   clock at end 3:28</a:t>
+            </a:r>
+          </a:p>
+          <a:p>
+            <a:r>
+              <a:t>==========================================================</a:t>
+            </a:r>
+          </a:p>
+          <a:p>
+            <a:r>
+              <a:t>SAY THIS:</a:t>
+            </a:r>
+          </a:p>
+          <a:p/>
+          <a:p>
+            <a:r>
+              <a:t>So we turned that into three questions, and they're on the slide.</a:t>
+            </a:r>
+          </a:p>
+          <a:p/>
+          <a:p>
+            <a:r>
+              <a:t>One, will there be a rush and how big. Classification, then regression.</a:t>
+            </a:r>
+          </a:p>
+          <a:p/>
+          <a:p>
+            <a:r>
+              <a:t>Two, what happens after the duty starts. This is the hard one, and it's our title. Either the goods</a:t>
+            </a:r>
+          </a:p>
+          <a:p>
+            <a:r>
+              <a:t>were borrowed and come back, or the demand was lost for good, or the same goods now come from a</a:t>
+            </a:r>
+          </a:p>
+          <a:p>
+            <a:r>
+              <a:t>different country.</a:t>
+            </a:r>
+          </a:p>
+          <a:p/>
+          <a:p>
+            <a:r>
+              <a:t>Three, how long it lasts. That's a duration problem, because some are still running at the end of</a:t>
+            </a:r>
+          </a:p>
+          <a:p>
+            <a:r>
+              <a:t>our data.</a:t>
+            </a:r>
+          </a:p>
+          <a:p/>
+          <a:p>
+            <a:r>
+              <a:t>Today is about our data and its limits, not results. But we found something the hard way, and</a:t>
+            </a:r>
+          </a:p>
+          <a:p>
+            <a:r>
+              <a:t>Raunak's going to take you through it.</a:t>
+            </a:r>
+          </a:p>
+          <a:p/>
+          <a:p>
+            <a:r>
+              <a:t>Raunak.</a:t>
+            </a:r>
+          </a:p>
+          <a:p/>
+          <a:p>
+            <a:r>
+              <a:t>==========================================================</a:t>
+            </a:r>
+          </a:p>
+          <a:p>
+            <a:r>
+              <a:t>HOW TO SAY IT: Do not read the sub-lines under each question, they are already on the slide.</a:t>
+            </a:r>
+          </a:p>
+          <a:p/>
+          <a:p>
+            <a:r>
+              <a:t>==========================================================</a:t>
+            </a:r>
+          </a:p>
+          <a:p>
+            <a:r>
+              <a:t>BACKGROUND, not for saying out loud:</a:t>
+            </a:r>
+          </a:p>
+          <a:p/>
+          <a:p>
+            <a:r>
               <a:t>THE ANALYTIC PROBLEM. Short, it is a signpost.</a:t>
             </a:r>
           </a:p>
@@ -1125,6 +1592,105 @@
           <a:lstStyle/>
           <a:p>
             <a:r>
+              <a:t>RAUNAK   |   this slide 1:18   |   clock at end 4:47</a:t>
+            </a:r>
+          </a:p>
+          <a:p>
+            <a:r>
+              <a:t>==========================================================</a:t>
+            </a:r>
+          </a:p>
+          <a:p>
+            <a:r>
+              <a:t>SAY THIS:</a:t>
+            </a:r>
+          </a:p>
+          <a:p/>
+          <a:p>
+            <a:r>
+              <a:t>Thanks Rahul. Two data sources, both free and public.</a:t>
+            </a:r>
+          </a:p>
+          <a:p/>
+          <a:p>
+            <a:r>
+              <a:t>Figure 3 on the left is US Census trade data, every month from January 2015 to August 2026. 140</a:t>
+            </a:r>
+          </a:p>
+          <a:p>
+            <a:r>
+              <a:t>months, about 15.9 million rows. The last bar is grey because 2026 is only eight months so far.</a:t>
+            </a:r>
+          </a:p>
+          <a:p/>
+          <a:p>
+            <a:r>
+              <a:t>Table 1 on the right shows what one row is. One product, one country, one month. This product code,</a:t>
+            </a:r>
+          </a:p>
+          <a:p>
+            <a:r>
+              <a:t>from Chile, March 2025, 715 million dollars and about 74 million kilograms.</a:t>
+            </a:r>
+          </a:p>
+          <a:p/>
+          <a:p>
+            <a:r>
+              <a:t>Now look at that first column. Those are eight digit codes, and we pull our data at ten digits.</a:t>
+            </a:r>
+          </a:p>
+          <a:p>
+            <a:r>
+              <a:t>Here's why. A tariff order doesn't say "copper", it lists specific eight digit codes, and ten digits</a:t>
+            </a:r>
+          </a:p>
+          <a:p>
+            <a:r>
+              <a:t>sit inside eight. So we can match a tariff to exactly the products it names instead of guessing.</a:t>
+            </a:r>
+          </a:p>
+          <a:p/>
+          <a:p>
+            <a:r>
+              <a:t>How do we know the data's right? 2017 adds up to 2,340 billion dollars against a published 2.34</a:t>
+            </a:r>
+          </a:p>
+          <a:p>
+            <a:r>
+              <a:t>trillion, and all 140 months check against a separate total.</a:t>
+            </a:r>
+          </a:p>
+          <a:p/>
+          <a:p>
+            <a:r>
+              <a:t>Second source is the Federal Register. 2,792 documents, 134 real tariff actions.</a:t>
+            </a:r>
+          </a:p>
+          <a:p/>
+          <a:p>
+            <a:r>
+              <a:t>==========================================================</a:t>
+            </a:r>
+          </a:p>
+          <a:p>
+            <a:r>
+              <a:t>HOW TO SAY IT: Point left for Figure 3, then right for Table 1. Say the figure numbers out loud.</a:t>
+            </a:r>
+          </a:p>
+          <a:p/>
+          <a:p>
+            <a:r>
+              <a:t>==========================================================</a:t>
+            </a:r>
+          </a:p>
+          <a:p>
+            <a:r>
+              <a:t>BACKGROUND, not for saying out loud:</a:t>
+            </a:r>
+          </a:p>
+          <a:p/>
+          <a:p>
+            <a:r>
               <a:t>THE DATA. RAUNAK STARTS HERE. Two things on this slide, go left then right.</a:t>
             </a:r>
           </a:p>
@@ -1225,6 +1791,110 @@
           <a:lstStyle/>
           <a:p>
             <a:r>
+              <a:t>RAUNAK   |   this slide 1:22   |   clock at end 6:09</a:t>
+            </a:r>
+          </a:p>
+          <a:p>
+            <a:r>
+              <a:t>==========================================================</a:t>
+            </a:r>
+          </a:p>
+          <a:p>
+            <a:r>
+              <a:t>SAY THIS:</a:t>
+            </a:r>
+          </a:p>
+          <a:p/>
+          <a:p>
+            <a:r>
+              <a:t>The first thing we tried was to find the months that look weird.</a:t>
+            </a:r>
+          </a:p>
+          <a:p/>
+          <a:p>
+            <a:r>
+              <a:t>For each product group we worked out from earlier years what it would normally have done, drew a</a:t>
+            </a:r>
+          </a:p>
+          <a:p>
+            <a:r>
+              <a:t>band for ordinary wobble, and anything outside that band counts as unusual.</a:t>
+            </a:r>
+          </a:p>
+          <a:p/>
+          <a:p>
+            <a:r>
+              <a:t>Figure 4 ranks the ten groups that went furthest outside their own normal range in 2025. The scale</a:t>
+            </a:r>
+          </a:p>
+          <a:p>
+            <a:r>
+              <a:t>along the bottom is how many times outside the band, so one is right at the edge.</a:t>
+            </a:r>
+          </a:p>
+          <a:p/>
+          <a:p>
+            <a:r>
+              <a:t>Some look like tariff stories. Organic chemicals and pharmaceuticals were both under open tariff</a:t>
+            </a:r>
+          </a:p>
+          <a:p>
+            <a:r>
+              <a:t>threat in 2025.</a:t>
+            </a:r>
+          </a:p>
+          <a:p/>
+          <a:p>
+            <a:r>
+              <a:t>But look at the red ones. Silk is only about 55 million dollars a year, so almost any month looks</a:t>
+            </a:r>
+          </a:p>
+          <a:p>
+            <a:r>
+              <a:t>extreme. And cocoa's up there because cocoa prices roughly tripled after bad harvests in West</a:t>
+            </a:r>
+          </a:p>
+          <a:p>
+            <a:r>
+              <a:t>Africa. We measure in dollars, so a price spike looks exactly like a surge in volume.</a:t>
+            </a:r>
+          </a:p>
+          <a:p/>
+          <a:p>
+            <a:r>
+              <a:t>So the detector finds unusual months but has no idea why. It can't tell a tariff from a bad</a:t>
+            </a:r>
+          </a:p>
+          <a:p>
+            <a:r>
+              <a:t>harvest. Connecting an unusual month to an actual tariff is the next slide.</a:t>
+            </a:r>
+          </a:p>
+          <a:p/>
+          <a:p>
+            <a:r>
+              <a:t>==========================================================</a:t>
+            </a:r>
+          </a:p>
+          <a:p>
+            <a:r>
+              <a:t>HOW TO SAY IT: Point at the bottom axis when you explain the scale, then at the red bars.</a:t>
+            </a:r>
+          </a:p>
+          <a:p/>
+          <a:p>
+            <a:r>
+              <a:t>==========================================================</a:t>
+            </a:r>
+          </a:p>
+          <a:p>
+            <a:r>
+              <a:t>BACKGROUND, not for saying out loud:</a:t>
+            </a:r>
+          </a:p>
+          <a:p/>
+          <a:p>
+            <a:r>
               <a:t>METHOD AND ITS LIMIT. This is the slide that shows judgement, do not skip it.</a:t>
             </a:r>
           </a:p>
@@ -1325,6 +1995,132 @@
           <a:lstStyle/>
           <a:p>
             <a:r>
+              <a:t>RAUNAK   |   this slide 1:42   |   clock at end 7:52</a:t>
+            </a:r>
+          </a:p>
+          <a:p>
+            <a:r>
+              <a:t>==========================================================</a:t>
+            </a:r>
+          </a:p>
+          <a:p>
+            <a:r>
+              <a:t>SAY THIS:</a:t>
+            </a:r>
+          </a:p>
+          <a:p/>
+          <a:p>
+            <a:r>
+              <a:t>A tariff order never says "chapter 74, copper". It points at a list of specific eight digit</a:t>
+            </a:r>
+          </a:p>
+          <a:p>
+            <a:r>
+              <a:t>codes, usually in a separate legal notice. So if you haven't read those lists, all you can do is</a:t>
+            </a:r>
+          </a:p>
+          <a:p>
+            <a:r>
+              <a:t>mark a whole product group as tariffed whenever any action touches anything inside it.</a:t>
+            </a:r>
+          </a:p>
+          <a:p/>
+          <a:p>
+            <a:r>
+              <a:t>That's what we did. And we got nothing.</a:t>
+            </a:r>
+          </a:p>
+          <a:p/>
+          <a:p>
+            <a:r>
+              <a:t>So we went and read the lists. 9,083 eight digit codes.</a:t>
+            </a:r>
+          </a:p>
+          <a:p/>
+          <a:p>
+            <a:r>
+              <a:t>Figure 5 is what we found. Each bar counts a tariff action paired with a product group. The typical</a:t>
+            </a:r>
+          </a:p>
+          <a:p>
+            <a:r>
+              <a:t>one covers about five percent of that group's value, and the red on the left is a third of them</a:t>
+            </a:r>
+          </a:p>
+          <a:p>
+            <a:r>
+              <a:t>covering less than one percent.</a:t>
+            </a:r>
+          </a:p>
+          <a:p/>
+          <a:p>
+            <a:r>
+              <a:t>Copper again. Ten actions touch copper. Three cover more than half of it. The other seven cover</a:t>
+            </a:r>
+          </a:p>
+          <a:p>
+            <a:r>
+              <a:t>less than one percent.</a:t>
+            </a:r>
+          </a:p>
+          <a:p/>
+          <a:p>
+            <a:r>
+              <a:t>And that's why we got nothing. If you label a product group tariffed when ninety-five percent of it</a:t>
+            </a:r>
+          </a:p>
+          <a:p>
+            <a:r>
+              <a:t>wasn't, any real reaction in the five percent gets averaged away by the ninety-five percent that</a:t>
+            </a:r>
+          </a:p>
+          <a:p>
+            <a:r>
+              <a:t>did nothing. The zero wasn't telling us about the world. It was telling us about our ruler.</a:t>
+            </a:r>
+          </a:p>
+          <a:p/>
+          <a:p>
+            <a:r>
+              <a:t>It was one of three reasons, and it's the one that generalizes.</a:t>
+            </a:r>
+          </a:p>
+          <a:p/>
+          <a:p>
+            <a:r>
+              <a:t>The fix is to work at eight digits, where a tariff either names a product or it doesn't. Everything</a:t>
+            </a:r>
+          </a:p>
+          <a:p>
+            <a:r>
+              <a:t>from here is built that way.</a:t>
+            </a:r>
+          </a:p>
+          <a:p/>
+          <a:p>
+            <a:r>
+              <a:t>==========================================================</a:t>
+            </a:r>
+          </a:p>
+          <a:p>
+            <a:r>
+              <a:t>HOW TO SAY IT: Slow down. This is the slide that matters most. Point at the red bars on the left.</a:t>
+            </a:r>
+          </a:p>
+          <a:p/>
+          <a:p>
+            <a:r>
+              <a:t>==========================================================</a:t>
+            </a:r>
+          </a:p>
+          <a:p>
+            <a:r>
+              <a:t>BACKGROUND, not for saying out loud:</a:t>
+            </a:r>
+          </a:p>
+          <a:p/>
+          <a:p>
+            <a:r>
               <a:t>THE KEY SLIDE. If time runs short, this is the one that must survive.</a:t>
             </a:r>
           </a:p>
@@ -1462,6 +2258,122 @@
         <p:txBody>
           <a:bodyPr/>
           <a:lstStyle/>
+          <a:p>
+            <a:r>
+              <a:t>RAUNAK   |   this slide 1:24   |   clock at end 9:16</a:t>
+            </a:r>
+          </a:p>
+          <a:p>
+            <a:r>
+              <a:t>==========================================================</a:t>
+            </a:r>
+          </a:p>
+          <a:p>
+            <a:r>
+              <a:t>SAY THIS:</a:t>
+            </a:r>
+          </a:p>
+          <a:p/>
+          <a:p>
+            <a:r>
+              <a:t>Built and checked: 140 months of trade at the level tariffs are actually written, reconciled</a:t>
+            </a:r>
+          </a:p>
+          <a:p>
+            <a:r>
+              <a:t>against published totals.</a:t>
+            </a:r>
+          </a:p>
+          <a:p/>
+          <a:p>
+            <a:r>
+              <a:t>A detector that finds unusual months, and that on its own can't tell a tariff from a price shock.</a:t>
+            </a:r>
+          </a:p>
+          <a:p/>
+          <a:p>
+            <a:r>
+              <a:t>134 tariff actions, with the real product lists behind each one.</a:t>
+            </a:r>
+          </a:p>
+          <a:p/>
+          <a:p>
+            <a:r>
+              <a:t>How we'll measure it, and this is what fixes the detector. Instead of comparing a product to its</a:t>
+            </a:r>
+          </a:p>
+          <a:p>
+            <a:r>
+              <a:t>own past, we compare one product across countries in the same month. A price shock moves every</a:t>
+            </a:r>
+          </a:p>
+          <a:p>
+            <a:r>
+              <a:t>country together so it cancels out. A tariff hits one country, so it doesn't.</a:t>
+            </a:r>
+          </a:p>
+          <a:p/>
+          <a:p>
+            <a:r>
+              <a:t>How we'll know it's real: every estimate gets a placebo, the identical calculation with every event</a:t>
+            </a:r>
+          </a:p>
+          <a:p>
+            <a:r>
+              <a:t>shifted back two years. If it doesn't separate from its placebo, we don't report it. That's already</a:t>
+            </a:r>
+          </a:p>
+          <a:p>
+            <a:r>
+              <a:t>killed three methods we built.</a:t>
+            </a:r>
+          </a:p>
+          <a:p/>
+          <a:p>
+            <a:r>
+              <a:t>Next, question one first, then two and three for the final report.</a:t>
+            </a:r>
+          </a:p>
+          <a:p/>
+          <a:p>
+            <a:r>
+              <a:t>And the takeaway, even if you never touch tariff data. Don't measure this at product group level.</a:t>
+            </a:r>
+          </a:p>
+          <a:p>
+            <a:r>
+              <a:t>The typical action touches five percent, so a real effect averages away to nothing.</a:t>
+            </a:r>
+          </a:p>
+          <a:p/>
+          <a:p>
+            <a:r>
+              <a:t>Happy to take questions.</a:t>
+            </a:r>
+          </a:p>
+          <a:p/>
+          <a:p>
+            <a:r>
+              <a:t>==========================================================</a:t>
+            </a:r>
+          </a:p>
+          <a:p>
+            <a:r>
+              <a:t>HOW TO SAY IT: Stand still and let the list do the work. Slow down for the last two lines.</a:t>
+            </a:r>
+          </a:p>
+          <a:p/>
+          <a:p>
+            <a:r>
+              <a:t>==========================================================</a:t>
+            </a:r>
+          </a:p>
+          <a:p>
+            <a:r>
+              <a:t>BACKGROUND, not for saying out loud:</a:t>
+            </a:r>
+          </a:p>
+          <a:p/>
           <a:p>
             <a:r>
               <a:t>DISCUSSION AND NEXT STEPS.</a:t>

--- a/slides/Mandadi_Khalsa_Presentation1.pptx
+++ b/slides/Mandadi_Khalsa_Presentation1.pptx
@@ -991,7 +991,7 @@
           <a:lstStyle/>
           <a:p>
             <a:r>
-              <a:t>RAHUL   |   this slide 1:04   |   clock at end 1:33</a:t>
+              <a:t>RAHUL   |   this slide 1:06   |   clock at end 1:35</a:t>
             </a:r>
           </a:p>
           <a:p>
@@ -1029,17 +1029,17 @@
           <a:p/>
           <a:p>
             <a:r>
-              <a:t>But look at what the line does. It doesn't wait for July. It starts climbing in February and nearly</a:t>
-            </a:r>
-          </a:p>
-          <a:p>
-            <a:r>
-              <a:t>triples by the announcement, because the investigation behind that tariff was public months</a:t>
-            </a:r>
-          </a:p>
-          <a:p>
-            <a:r>
-              <a:t>earlier. Everyone in the industry could see it coming.</a:t>
+              <a:t>But look at what the line does. It doesn't wait for July. It starts climbing in February, and</a:t>
+            </a:r>
+          </a:p>
+          <a:p>
+            <a:r>
+              <a:t>nearly triples by the time of the announcement. Why? Because the investigation behind that tariff</a:t>
+            </a:r>
+          </a:p>
+          <a:p>
+            <a:r>
+              <a:t>was public months earlier. Everyone in the industry could see it coming.</a:t>
             </a:r>
           </a:p>
           <a:p/>
@@ -1057,7 +1057,7 @@
           <a:p/>
           <a:p>
             <a:r>
-              <a:t>That's front-loading. Goods that would have arrived in October came in in June instead. Nothing got</a:t>
+              <a:t>That's front-loading. Goods that would have come in October came in June instead. Nothing got</a:t>
             </a:r>
           </a:p>
           <a:p>
@@ -1212,7 +1212,7 @@
           <a:lstStyle/>
           <a:p>
             <a:r>
-              <a:t>RAHUL   |   this slide 1:03   |   clock at end 2:37</a:t>
+              <a:t>RAHUL   |   this slide 1:10   |   clock at end 2:45</a:t>
             </a:r>
           </a:p>
           <a:p>
@@ -1245,22 +1245,28 @@
           <a:p/>
           <a:p>
             <a:r>
-              <a:t>Figure 2 is that problem. Day zero, the tariff gets announced. If you're importing from the country</a:t>
-            </a:r>
-          </a:p>
-          <a:p>
-            <a:r>
-              <a:t>that just got hit, you have a decision. Wait it out, or go find a new supplier? Requalifying takes</a:t>
-            </a:r>
-          </a:p>
-          <a:p>
-            <a:r>
-              <a:t>months and real money. A lender behind that trade and a carrier running that route face the same</a:t>
-            </a:r>
-          </a:p>
-          <a:p>
-            <a:r>
-              <a:t>question.</a:t>
+              <a:t>Figure 2 is that problem. Day zero, the tariff gets announced. If you're importing from the</a:t>
+            </a:r>
+          </a:p>
+          <a:p>
+            <a:r>
+              <a:t>country that just got hit, you have a decision. Wait it out, or go and find a new supplier?</a:t>
+            </a:r>
+          </a:p>
+          <a:p>
+            <a:r>
+              <a:t>Qualifying a new supplier takes months and real money.</a:t>
+            </a:r>
+          </a:p>
+          <a:p/>
+          <a:p>
+            <a:r>
+              <a:t>And it isn't just importers. A bank that lent against that trade is asking the same question. So</a:t>
+            </a:r>
+          </a:p>
+          <a:p>
+            <a:r>
+              <a:t>is the carrier running that route.</a:t>
             </a:r>
           </a:p>
           <a:p/>
@@ -1283,12 +1289,12 @@
           <a:p/>
           <a:p>
             <a:r>
-              <a:t>So by the time you've seen two bad months, the tariff's been in force a quarter, and every one of</a:t>
-            </a:r>
-          </a:p>
-          <a:p>
-            <a:r>
-              <a:t>those decisions is already made.</a:t>
+              <a:t>So by the time you've seen two bad months, the tariff's been in force for a quarter, and every one</a:t>
+            </a:r>
+          </a:p>
+          <a:p>
+            <a:r>
+              <a:t>of those decisions is already made.</a:t>
             </a:r>
           </a:p>
           <a:p/>
@@ -1410,7 +1416,7 @@
           <a:lstStyle/>
           <a:p>
             <a:r>
-              <a:t>RAHUL   |   this slide 0:51   |   clock at end 3:28</a:t>
+              <a:t>RAHUL   |   this slide 0:51   |   clock at end 3:36</a:t>
             </a:r>
           </a:p>
           <a:p>
@@ -1438,17 +1444,17 @@
           <a:p/>
           <a:p>
             <a:r>
-              <a:t>Two, what happens after the duty starts. This is the hard one, and it's our title. Either the goods</a:t>
-            </a:r>
-          </a:p>
-          <a:p>
-            <a:r>
-              <a:t>were borrowed and come back, or the demand was lost for good, or the same goods now come from a</a:t>
-            </a:r>
-          </a:p>
-          <a:p>
-            <a:r>
-              <a:t>different country.</a:t>
+              <a:t>Two, what happens after the duty starts. This is the hard one, and it's our title. Either the</a:t>
+            </a:r>
+          </a:p>
+          <a:p>
+            <a:r>
+              <a:t>goods were borrowed and come back, or the demand was lost for good, or the same goods now come</a:t>
+            </a:r>
+          </a:p>
+          <a:p>
+            <a:r>
+              <a:t>from a different country.</a:t>
             </a:r>
           </a:p>
           <a:p/>
@@ -1592,7 +1598,7 @@
           <a:lstStyle/>
           <a:p>
             <a:r>
-              <a:t>RAUNAK   |   this slide 1:18   |   clock at end 4:47</a:t>
+              <a:t>RAUNAK   |   this slide 1:31   |   clock at end 5:08</a:t>
             </a:r>
           </a:p>
           <a:p>
@@ -1625,12 +1631,12 @@
           <a:p/>
           <a:p>
             <a:r>
-              <a:t>Table 1 on the right shows what one row is. One product, one country, one month. This product code,</a:t>
-            </a:r>
-          </a:p>
-          <a:p>
-            <a:r>
-              <a:t>from Chile, March 2025, 715 million dollars and about 74 million kilograms.</a:t>
+              <a:t>Table 1 on the right shows what one row is. One product, one country, one month. This product</a:t>
+            </a:r>
+          </a:p>
+          <a:p>
+            <a:r>
+              <a:t>code, from Chile, March 2025, 715 million dollars and about 74 million kilograms.</a:t>
             </a:r>
           </a:p>
           <a:p/>
@@ -1641,29 +1647,44 @@
           </a:p>
           <a:p>
             <a:r>
-              <a:t>Here's why. A tariff order doesn't say "copper", it lists specific eight digit codes, and ten digits</a:t>
-            </a:r>
-          </a:p>
-          <a:p>
-            <a:r>
-              <a:t>sit inside eight. So we can match a tariff to exactly the products it names instead of guessing.</a:t>
-            </a:r>
-          </a:p>
-          <a:p/>
-          <a:p>
-            <a:r>
-              <a:t>How do we know the data's right? 2017 adds up to 2,340 billion dollars against a published 2.34</a:t>
-            </a:r>
-          </a:p>
-          <a:p>
-            <a:r>
-              <a:t>trillion, and all 140 months check against a separate total.</a:t>
-            </a:r>
-          </a:p>
-          <a:p/>
-          <a:p>
-            <a:r>
-              <a:t>Second source is the Federal Register. 2,792 documents, 134 real tariff actions.</a:t>
+              <a:t>Here's why. A tariff order doesn't say "copper". It lists specific eight digit codes. And ten</a:t>
+            </a:r>
+          </a:p>
+          <a:p>
+            <a:r>
+              <a:t>digits sit inside eight, so we can match a tariff to exactly the products it names instead of</a:t>
+            </a:r>
+          </a:p>
+          <a:p>
+            <a:r>
+              <a:t>guessing.</a:t>
+            </a:r>
+          </a:p>
+          <a:p/>
+          <a:p>
+            <a:r>
+              <a:t>How do we know the data's right? Add up 2017 and we get two point three four trillion dollars. The</a:t>
+            </a:r>
+          </a:p>
+          <a:p>
+            <a:r>
+              <a:t>published figure is two point three four trillion. And all 140 months check against a separate</a:t>
+            </a:r>
+          </a:p>
+          <a:p>
+            <a:r>
+              <a:t>total the API gives us.</a:t>
+            </a:r>
+          </a:p>
+          <a:p/>
+          <a:p>
+            <a:r>
+              <a:t>Second source is the Federal Register. We went through nearly two thousand eight hundred</a:t>
+            </a:r>
+          </a:p>
+          <a:p>
+            <a:r>
+              <a:t>documents, and a hundred and thirty four of them are real tariff actions.</a:t>
             </a:r>
           </a:p>
           <a:p/>
@@ -1791,7 +1812,7 @@
           <a:lstStyle/>
           <a:p>
             <a:r>
-              <a:t>RAUNAK   |   this slide 1:22   |   clock at end 6:09</a:t>
+              <a:t>RAUNAK   |   this slide 1:22   |   clock at end 6:30</a:t>
             </a:r>
           </a:p>
           <a:p>
@@ -1813,12 +1834,17 @@
           <a:p/>
           <a:p>
             <a:r>
-              <a:t>For each product group we worked out from earlier years what it would normally have done, drew a</a:t>
-            </a:r>
-          </a:p>
-          <a:p>
-            <a:r>
-              <a:t>band for ordinary wobble, and anything outside that band counts as unusual.</a:t>
+              <a:t>For each product group, we used the earlier years to work out what it would normally have done.</a:t>
+            </a:r>
+          </a:p>
+          <a:p>
+            <a:r>
+              <a:t>Then we drew a band around that for ordinary month to month wobble. Anything outside the band</a:t>
+            </a:r>
+          </a:p>
+          <a:p>
+            <a:r>
+              <a:t>counts as unusual.</a:t>
             </a:r>
           </a:p>
           <a:p/>
@@ -1862,12 +1888,12 @@
           <a:p/>
           <a:p>
             <a:r>
-              <a:t>So the detector finds unusual months but has no idea why. It can't tell a tariff from a bad</a:t>
-            </a:r>
-          </a:p>
-          <a:p>
-            <a:r>
-              <a:t>harvest. Connecting an unusual month to an actual tariff is the next slide.</a:t>
+              <a:t>So the detector finds unusual months, but it has no idea why. It can't tell a tariff from a bad</a:t>
+            </a:r>
+          </a:p>
+          <a:p>
+            <a:r>
+              <a:t>harvest. That's the next slide.</a:t>
             </a:r>
           </a:p>
           <a:p/>
@@ -1995,7 +2021,7 @@
           <a:lstStyle/>
           <a:p>
             <a:r>
-              <a:t>RAUNAK   |   this slide 1:42   |   clock at end 7:52</a:t>
+              <a:t>RAUNAK   |   this slide 1:44   |   clock at end 8:15</a:t>
             </a:r>
           </a:p>
           <a:p>
@@ -2011,17 +2037,17 @@
           <a:p/>
           <a:p>
             <a:r>
-              <a:t>A tariff order never says "chapter 74, copper". It points at a list of specific eight digit</a:t>
-            </a:r>
-          </a:p>
-          <a:p>
-            <a:r>
-              <a:t>codes, usually in a separate legal notice. So if you haven't read those lists, all you can do is</a:t>
-            </a:r>
-          </a:p>
-          <a:p>
-            <a:r>
-              <a:t>mark a whole product group as tariffed whenever any action touches anything inside it.</a:t>
+              <a:t>A tariff order never says "chapter 74, copper". It points at a list of specific eight digit codes,</a:t>
+            </a:r>
+          </a:p>
+          <a:p>
+            <a:r>
+              <a:t>usually in a separate legal notice. So if you haven't read those lists, there's only one thing you</a:t>
+            </a:r>
+          </a:p>
+          <a:p>
+            <a:r>
+              <a:t>can do. You mark a whole product group as tariffed whenever any action touches anything inside it.</a:t>
             </a:r>
           </a:p>
           <a:p/>
@@ -2033,23 +2059,23 @@
           <a:p/>
           <a:p>
             <a:r>
-              <a:t>So we went and read the lists. 9,083 eight digit codes.</a:t>
-            </a:r>
-          </a:p>
-          <a:p/>
-          <a:p>
-            <a:r>
-              <a:t>Figure 5 is what we found. Each bar counts a tariff action paired with a product group. The typical</a:t>
-            </a:r>
-          </a:p>
-          <a:p>
-            <a:r>
-              <a:t>one covers about five percent of that group's value, and the red on the left is a third of them</a:t>
-            </a:r>
-          </a:p>
-          <a:p>
-            <a:r>
-              <a:t>covering less than one percent.</a:t>
+              <a:t>So we went and read the lists. Nine thousand and eighty three eight digit codes.</a:t>
+            </a:r>
+          </a:p>
+          <a:p/>
+          <a:p>
+            <a:r>
+              <a:t>Figure 5 is what we found. Each bar counts a tariff action paired with a product group. The</a:t>
+            </a:r>
+          </a:p>
+          <a:p>
+            <a:r>
+              <a:t>typical one covers about five percent of that group's value, and the red on the left is a third of</a:t>
+            </a:r>
+          </a:p>
+          <a:p>
+            <a:r>
+              <a:t>them covering less than one percent.</a:t>
             </a:r>
           </a:p>
           <a:p/>
@@ -2066,17 +2092,17 @@
           <a:p/>
           <a:p>
             <a:r>
-              <a:t>And that's why we got nothing. If you label a product group tariffed when ninety-five percent of it</a:t>
-            </a:r>
-          </a:p>
-          <a:p>
-            <a:r>
-              <a:t>wasn't, any real reaction in the five percent gets averaged away by the ninety-five percent that</a:t>
-            </a:r>
-          </a:p>
-          <a:p>
-            <a:r>
-              <a:t>did nothing. The zero wasn't telling us about the world. It was telling us about our ruler.</a:t>
+              <a:t>And that's why we got nothing. If you label a product group tariffed when ninety-five percent of</a:t>
+            </a:r>
+          </a:p>
+          <a:p>
+            <a:r>
+              <a:t>it wasn't, the real reaction in that five percent gets averaged away by everything that didn't</a:t>
+            </a:r>
+          </a:p>
+          <a:p>
+            <a:r>
+              <a:t>move. The zero wasn't telling us about the world. It was telling us about our ruler.</a:t>
             </a:r>
           </a:p>
           <a:p/>
@@ -2088,12 +2114,12 @@
           <a:p/>
           <a:p>
             <a:r>
-              <a:t>The fix is to work at eight digits, where a tariff either names a product or it doesn't. Everything</a:t>
-            </a:r>
-          </a:p>
-          <a:p>
-            <a:r>
-              <a:t>from here is built that way.</a:t>
+              <a:t>The fix is to work at eight digits, where a tariff either names a product or it doesn't.</a:t>
+            </a:r>
+          </a:p>
+          <a:p>
+            <a:r>
+              <a:t>Everything from here is built that way.</a:t>
             </a:r>
           </a:p>
           <a:p/>
@@ -2260,7 +2286,7 @@
           <a:lstStyle/>
           <a:p>
             <a:r>
-              <a:t>RAUNAK   |   this slide 1:24   |   clock at end 9:16</a:t>
+              <a:t>RAUNAK   |   this slide 1:30   |   clock at end 9:45</a:t>
             </a:r>
           </a:p>
           <a:p>
@@ -2276,18 +2302,23 @@
           <a:p/>
           <a:p>
             <a:r>
-              <a:t>Built and checked: 140 months of trade at the level tariffs are actually written, reconciled</a:t>
-            </a:r>
-          </a:p>
-          <a:p>
-            <a:r>
-              <a:t>against published totals.</a:t>
-            </a:r>
-          </a:p>
-          <a:p/>
-          <a:p>
-            <a:r>
-              <a:t>A detector that finds unusual months, and that on its own can't tell a tariff from a price shock.</a:t>
+              <a:t>Built and checked. We've got 140 months of trade at the level tariffs are actually written, and it</a:t>
+            </a:r>
+          </a:p>
+          <a:p>
+            <a:r>
+              <a:t>reconciles against published totals.</a:t>
+            </a:r>
+          </a:p>
+          <a:p/>
+          <a:p>
+            <a:r>
+              <a:t>We've got a detector that finds unusual months, and we're upfront that on its own it can't tell a</a:t>
+            </a:r>
+          </a:p>
+          <a:p>
+            <a:r>
+              <a:t>tariff from a price shock.</a:t>
             </a:r>
           </a:p>
           <a:p/>
@@ -2315,17 +2346,17 @@
           <a:p/>
           <a:p>
             <a:r>
-              <a:t>How we'll know it's real: every estimate gets a placebo, the identical calculation with every event</a:t>
-            </a:r>
-          </a:p>
-          <a:p>
-            <a:r>
-              <a:t>shifted back two years. If it doesn't separate from its placebo, we don't report it. That's already</a:t>
-            </a:r>
-          </a:p>
-          <a:p>
-            <a:r>
-              <a:t>killed three methods we built.</a:t>
+              <a:t>How we'll know it's real. Every estimate gets paired with a placebo, which is the identical</a:t>
+            </a:r>
+          </a:p>
+          <a:p>
+            <a:r>
+              <a:t>calculation with every event shifted back two years. If it doesn't separate from its placebo, we</a:t>
+            </a:r>
+          </a:p>
+          <a:p>
+            <a:r>
+              <a:t>don't report it. That's already killed three methods we built.</a:t>
             </a:r>
           </a:p>
           <a:p/>

--- a/slides/Mandadi_Khalsa_Presentation1.pptx
+++ b/slides/Mandadi_Khalsa_Presentation1.pptx
@@ -594,7 +594,7 @@
           </a:p>
           <a:p>
             <a:r>
-              <a:t>A: Whoever is exposed to one country rather than to total volume: an importer requalifying a supplier, a lender behind either side, a carrier running that route. We are still testing which the data serves best. An earlier version of this project named port and terminal operators; we tested that and dropped it, because displaced volume arrives from a different country through much the same US customs districts.</a:t>
+              <a:t>A: Whoever is tied to one country rather than to overall volume: an importer looking for a new supplier, a lender behind either side, a carrier running that route. We are still working out which of those the data helps most. An earlier version of this project said port and terminal operators; we tested that and dropped it, because the goods that stop coming from one country just arrive from another, through much the same US ports.</a:t>
             </a:r>
           </a:p>
           <a:p/>
@@ -605,7 +605,7 @@
           </a:p>
           <a:p>
             <a:r>
-              <a:t>A: The median over 1,350 action and product group pairs. Per action the median is 1.3 percent, so the slide is the conservative version.</a:t>
+              <a:t>A: It is the middle value across 1,350 pairs of one tariff action and one product group. If you work it out per action instead, the middle value is 1.3 percent, so the slide uses the safer number.</a:t>
             </a:r>
           </a:p>
           <a:p/>
@@ -616,7 +616,7 @@
           </a:p>
           <a:p>
             <a:r>
-              <a:t>A: Our announcement dates are mostly implementing notices, so the median official window is nine days and there is almost no anticipation period left in the data. That is what the copper story answers: the rush runs on news, not on documents. And the partner dimension was collapsed, which the across-origins design fixes.</a:t>
+              <a:t>A: First, most of the dates we have come from notices that just put an earlier decision into effect. So the gap between the date we hold and the start date is only about nine days, which leaves almost no run-up to measure. The copper story answers that one: the rush runs on news, not on paperwork. Second, we had lumped all the supplying countries together, which comparing across countries fixes.</a:t>
             </a:r>
           </a:p>
           <a:p/>
@@ -2021,7 +2021,7 @@
           <a:lstStyle/>
           <a:p>
             <a:r>
-              <a:t>RAUNAK   |   this slide 1:44   |   clock at end 8:15</a:t>
+              <a:t>RAUNAK   |   this slide 1:48   |   clock at end 8:19</a:t>
             </a:r>
           </a:p>
           <a:p>
@@ -2108,7 +2108,12 @@
           <a:p/>
           <a:p>
             <a:r>
-              <a:t>It was one of three reasons, and it's the one that generalizes.</a:t>
+              <a:t>It was one of three reasons, and it's the one that isn't just our problem. Anyone doing this</a:t>
+            </a:r>
+          </a:p>
+          <a:p>
+            <a:r>
+              <a:t>would hit it.</a:t>
             </a:r>
           </a:p>
           <a:p/>
@@ -2286,7 +2291,7 @@
           <a:lstStyle/>
           <a:p>
             <a:r>
-              <a:t>RAUNAK   |   this slide 1:30   |   clock at end 9:45</a:t>
+              <a:t>RAUNAK   |   this slide 1:31   |   clock at end 9:51</a:t>
             </a:r>
           </a:p>
           <a:p>
@@ -2307,7 +2312,7 @@
           </a:p>
           <a:p>
             <a:r>
-              <a:t>reconciles against published totals.</a:t>
+              <a:t>adds up to the published totals.</a:t>
             </a:r>
           </a:p>
           <a:p/>
@@ -2346,7 +2351,7 @@
           <a:p/>
           <a:p>
             <a:r>
-              <a:t>How we'll know it's real. Every estimate gets paired with a placebo, which is the identical</a:t>
+              <a:t>How we'll know it's real. Every estimate gets paired with a placebo, which is the exact same</a:t>
             </a:r>
           </a:p>
           <a:p>
@@ -8052,7 +8057,7 @@
                 </a:solidFill>
                 <a:latin typeface="Avenir Next"/>
               </a:rPr>
-              <a:t>months reconcile against a separate total the API returns on its own.</a:t>
+              <a:t>months match a separate total the API returns on its own.</a:t>
             </a:r>
           </a:p>
         </p:txBody>
@@ -8787,7 +8792,7 @@
                 </a:solidFill>
                 <a:latin typeface="Avenir Next"/>
               </a:rPr>
-              <a:t>140 months at the level tariffs are written, reconciled against published totals.</a:t>
+              <a:t>140 months at the level tariffs are written, and it adds up to the published totals.</a:t>
             </a:r>
           </a:p>
         </p:txBody>

--- a/slides/Mandadi_Khalsa_Presentation1.pptx
+++ b/slides/Mandadi_Khalsa_Presentation1.pptx
@@ -512,7 +512,7 @@
           <a:lstStyle/>
           <a:p>
             <a:r>
-              <a:t>RAHUL   |   this slide 0:29   |   clock at end 0:29</a:t>
+              <a:t>RAHUL   |   this slide 0:20   |   clock at end 0:20</a:t>
             </a:r>
           </a:p>
           <a:p>
@@ -534,12 +534,7 @@
           <a:p/>
           <a:p>
             <a:r>
-              <a:t>It's about what happens to imports when the US announces a tariff. The question is in the title.</a:t>
-            </a:r>
-          </a:p>
-          <a:p>
-            <a:r>
-              <a:t>Imports drop after a tariff starts, and we want to know whether the goods just arrived early, or</a:t>
+              <a:t>Imports drop after a tariff starts. We want to know whether the goods just arrived early, or</a:t>
             </a:r>
           </a:p>
           <a:p>
@@ -991,7 +986,7 @@
           <a:lstStyle/>
           <a:p>
             <a:r>
-              <a:t>RAHUL   |   this slide 1:06   |   clock at end 1:35</a:t>
+              <a:t>RAHUL   |   this slide 1:18   |   clock at end 1:38</a:t>
             </a:r>
           </a:p>
           <a:p>
@@ -1052,6 +1047,17 @@
           <a:p>
             <a:r>
               <a:t>Then August, and it drops hard.</a:t>
+            </a:r>
+          </a:p>
+          <a:p/>
+          <a:p>
+            <a:r>
+              <a:t>You'll also see it climb back up at the end. That's one product and one tariff, so we're not</a:t>
+            </a:r>
+          </a:p>
+          <a:p>
+            <a:r>
+              <a:t>reading anything into it. The measuring comes later.</a:t>
             </a:r>
           </a:p>
           <a:p/>
@@ -1212,7 +1218,7 @@
           <a:lstStyle/>
           <a:p>
             <a:r>
-              <a:t>RAHUL   |   this slide 1:10   |   clock at end 2:45</a:t>
+              <a:t>RAHUL   |   this slide 1:10   |   clock at end 2:48</a:t>
             </a:r>
           </a:p>
           <a:p>
@@ -1416,7 +1422,7 @@
           <a:lstStyle/>
           <a:p>
             <a:r>
-              <a:t>RAHUL   |   this slide 0:51   |   clock at end 3:36</a:t>
+              <a:t>RAHUL   |   this slide 0:51   |   clock at end 3:40</a:t>
             </a:r>
           </a:p>
           <a:p>
@@ -1598,7 +1604,7 @@
           <a:lstStyle/>
           <a:p>
             <a:r>
-              <a:t>RAUNAK   |   this slide 1:31   |   clock at end 5:08</a:t>
+              <a:t>RAUNAK   |   this slide 1:31   |   clock at end 5:12</a:t>
             </a:r>
           </a:p>
           <a:p>
@@ -1812,7 +1818,7 @@
           <a:lstStyle/>
           <a:p>
             <a:r>
-              <a:t>RAUNAK   |   this slide 1:22   |   clock at end 6:30</a:t>
+              <a:t>RAUNAK   |   this slide 1:22   |   clock at end 6:34</a:t>
             </a:r>
           </a:p>
           <a:p>
@@ -2021,7 +2027,7 @@
           <a:lstStyle/>
           <a:p>
             <a:r>
-              <a:t>RAUNAK   |   this slide 1:48   |   clock at end 8:19</a:t>
+              <a:t>RAUNAK   |   this slide 1:48   |   clock at end 8:23</a:t>
             </a:r>
           </a:p>
           <a:p>
@@ -2291,7 +2297,7 @@
           <a:lstStyle/>
           <a:p>
             <a:r>
-              <a:t>RAUNAK   |   this slide 1:31   |   clock at end 9:51</a:t>
+              <a:t>RAUNAK   |   this slide 1:31   |   clock at end 9:54</a:t>
             </a:r>
           </a:p>
           <a:p>

--- a/slides/Mandadi_Khalsa_Presentation1.pptx
+++ b/slides/Mandadi_Khalsa_Presentation1.pptx
@@ -986,7 +986,7 @@
           <a:lstStyle/>
           <a:p>
             <a:r>
-              <a:t>RAHUL   |   this slide 1:18   |   clock at end 1:38</a:t>
+              <a:t>RAHUL   |   this slide 1:16   |   clock at end 1:36</a:t>
             </a:r>
           </a:p>
           <a:p>
@@ -1013,28 +1013,33 @@
           <a:p/>
           <a:p>
             <a:r>
-              <a:t>Figure 1 is monthly copper imports, in dollars. Here's July 2025, when a fifty percent duty was</a:t>
-            </a:r>
-          </a:p>
-          <a:p>
-            <a:r>
-              <a:t>announced. Here's August, when it started. Three weeks apart.</a:t>
-            </a:r>
-          </a:p>
-          <a:p/>
-          <a:p>
-            <a:r>
-              <a:t>But look at what the line does. It doesn't wait for July. It starts climbing in February, and</a:t>
-            </a:r>
-          </a:p>
-          <a:p>
-            <a:r>
-              <a:t>nearly triples by the time of the announcement. Why? Because the investigation behind that tariff</a:t>
-            </a:r>
-          </a:p>
-          <a:p>
-            <a:r>
-              <a:t>was public months earlier. Everyone in the industry could see it coming.</a:t>
+              <a:t>Figure 1 is monthly copper imports, with three marks on it. The grey one is February 2025, when</a:t>
+            </a:r>
+          </a:p>
+          <a:p>
+            <a:r>
+              <a:t>the government ordered an investigation. Then July, when a fifty percent duty was announced. Then</a:t>
+            </a:r>
+          </a:p>
+          <a:p>
+            <a:r>
+              <a:t>August, when it started.</a:t>
+            </a:r>
+          </a:p>
+          <a:p/>
+          <a:p>
+            <a:r>
+              <a:t>Now look at where the line turns. It doesn't wait for July. It starts climbing right after the</a:t>
+            </a:r>
+          </a:p>
+          <a:p>
+            <a:r>
+              <a:t>grey line, and nearly triples before the duty is even announced. The investigation was public, so</a:t>
+            </a:r>
+          </a:p>
+          <a:p>
+            <a:r>
+              <a:t>everyone could see it coming.</a:t>
             </a:r>
           </a:p>
           <a:p/>
@@ -1063,17 +1068,12 @@
           <a:p/>
           <a:p>
             <a:r>
-              <a:t>That's front-loading. Goods that would have come in October came in June instead. Nothing got</a:t>
-            </a:r>
-          </a:p>
-          <a:p>
-            <a:r>
-              <a:t>created, it just moved forward in time. We call that borrowed, because the later months pay it</a:t>
-            </a:r>
-          </a:p>
-          <a:p>
-            <a:r>
-              <a:t>back.</a:t>
+              <a:t>That's front-loading. Goods that would have come in October came in June instead. We call that</a:t>
+            </a:r>
+          </a:p>
+          <a:p>
+            <a:r>
+              <a:t>borrowed, because the later months pay it back.</a:t>
             </a:r>
           </a:p>
           <a:p/>
@@ -1218,7 +1218,7 @@
           <a:lstStyle/>
           <a:p>
             <a:r>
-              <a:t>RAHUL   |   this slide 1:10   |   clock at end 2:48</a:t>
+              <a:t>RAHUL   |   this slide 1:10   |   clock at end 2:47</a:t>
             </a:r>
           </a:p>
           <a:p>
@@ -1422,7 +1422,7 @@
           <a:lstStyle/>
           <a:p>
             <a:r>
-              <a:t>RAHUL   |   this slide 0:51   |   clock at end 3:40</a:t>
+              <a:t>RAHUL   |   this slide 0:51   |   clock at end 3:38</a:t>
             </a:r>
           </a:p>
           <a:p>
@@ -1604,7 +1604,7 @@
           <a:lstStyle/>
           <a:p>
             <a:r>
-              <a:t>RAUNAK   |   this slide 1:31   |   clock at end 5:12</a:t>
+              <a:t>RAUNAK   |   this slide 1:31   |   clock at end 5:10</a:t>
             </a:r>
           </a:p>
           <a:p>
@@ -1818,7 +1818,7 @@
           <a:lstStyle/>
           <a:p>
             <a:r>
-              <a:t>RAUNAK   |   this slide 1:22   |   clock at end 6:34</a:t>
+              <a:t>RAUNAK   |   this slide 1:22   |   clock at end 6:32</a:t>
             </a:r>
           </a:p>
           <a:p>
@@ -2027,7 +2027,7 @@
           <a:lstStyle/>
           <a:p>
             <a:r>
-              <a:t>RAUNAK   |   this slide 1:48   |   clock at end 8:23</a:t>
+              <a:t>RAUNAK   |   this slide 1:48   |   clock at end 8:21</a:t>
             </a:r>
           </a:p>
           <a:p>
@@ -2297,7 +2297,7 @@
           <a:lstStyle/>
           <a:p>
             <a:r>
-              <a:t>RAUNAK   |   this slide 1:31   |   clock at end 9:54</a:t>
+              <a:t>RAUNAK   |   this slide 1:31   |   clock at end 9:53</a:t>
             </a:r>
           </a:p>
           <a:p>
@@ -6810,8 +6810,8 @@
         </p:blipFill>
         <p:spPr>
           <a:xfrm>
-            <a:off x="1920906" y="1874519"/>
-            <a:ext cx="8349882" cy="3822192"/>
+            <a:off x="1999047" y="1874519"/>
+            <a:ext cx="8193600" cy="3822192"/>
           </a:xfrm>
           <a:prstGeom prst="rect">
             <a:avLst/>
@@ -6852,7 +6852,7 @@
                 </a:solidFill>
                 <a:latin typeface="Avenir Next"/>
               </a:rPr>
-              <a:t>Fig. 1   Copper imports. Announced July 2025, in force from August.</a:t>
+              <a:t>Fig. 1   Copper. Investigation ordered in February, duty announced in July, in force from August.</a:t>
             </a:r>
           </a:p>
           <a:p>
@@ -6868,7 +6868,7 @@
                 </a:solidFill>
                 <a:latin typeface="Avenir Next"/>
               </a:rPr>
-              <a:t>Imports had been climbing since February, because the duty was expected.</a:t>
+              <a:t>The climb starts at the investigation, not at the announcement.</a:t>
             </a:r>
           </a:p>
           <a:p>

--- a/slides/Mandadi_Khalsa_Presentation1.pptx
+++ b/slides/Mandadi_Khalsa_Presentation1.pptx
@@ -986,7 +986,7 @@
           <a:lstStyle/>
           <a:p>
             <a:r>
-              <a:t>RAHUL   |   this slide 1:16   |   clock at end 1:36</a:t>
+              <a:t>RAHUL   |   this slide 1:18   |   clock at end 1:38</a:t>
             </a:r>
           </a:p>
           <a:p>
@@ -1013,33 +1013,28 @@
           <a:p/>
           <a:p>
             <a:r>
-              <a:t>Figure 1 is monthly copper imports, with three marks on it. The grey one is February 2025, when</a:t>
-            </a:r>
-          </a:p>
-          <a:p>
-            <a:r>
-              <a:t>the government ordered an investigation. Then July, when a fifty percent duty was announced. Then</a:t>
-            </a:r>
-          </a:p>
-          <a:p>
-            <a:r>
-              <a:t>August, when it started.</a:t>
-            </a:r>
-          </a:p>
-          <a:p/>
-          <a:p>
-            <a:r>
-              <a:t>Now look at where the line turns. It doesn't wait for July. It starts climbing right after the</a:t>
-            </a:r>
-          </a:p>
-          <a:p>
-            <a:r>
-              <a:t>grey line, and nearly triples before the duty is even announced. The investigation was public, so</a:t>
-            </a:r>
-          </a:p>
-          <a:p>
-            <a:r>
-              <a:t>everyone could see it coming.</a:t>
+              <a:t>Figure 1 is monthly copper imports, in dollars. Here's July 2025, when a fifty percent duty was</a:t>
+            </a:r>
+          </a:p>
+          <a:p>
+            <a:r>
+              <a:t>announced. Here's August, when it started. Three weeks apart.</a:t>
+            </a:r>
+          </a:p>
+          <a:p/>
+          <a:p>
+            <a:r>
+              <a:t>But look at what the line does. It doesn't wait for July. It starts climbing in February, and</a:t>
+            </a:r>
+          </a:p>
+          <a:p>
+            <a:r>
+              <a:t>nearly triples by the time of the announcement. Why? Because the investigation behind that tariff</a:t>
+            </a:r>
+          </a:p>
+          <a:p>
+            <a:r>
+              <a:t>was public months earlier. Everyone in the industry could see it coming.</a:t>
             </a:r>
           </a:p>
           <a:p/>
@@ -1068,12 +1063,17 @@
           <a:p/>
           <a:p>
             <a:r>
-              <a:t>That's front-loading. Goods that would have come in October came in June instead. We call that</a:t>
-            </a:r>
-          </a:p>
-          <a:p>
-            <a:r>
-              <a:t>borrowed, because the later months pay it back.</a:t>
+              <a:t>That's front-loading. Goods that would have come in October came in June instead. Nothing got</a:t>
+            </a:r>
+          </a:p>
+          <a:p>
+            <a:r>
+              <a:t>created, it just moved forward in time. We call that borrowed, because the later months pay it</a:t>
+            </a:r>
+          </a:p>
+          <a:p>
+            <a:r>
+              <a:t>back.</a:t>
             </a:r>
           </a:p>
           <a:p/>
@@ -1218,7 +1218,7 @@
           <a:lstStyle/>
           <a:p>
             <a:r>
-              <a:t>RAHUL   |   this slide 1:10   |   clock at end 2:47</a:t>
+              <a:t>RAHUL   |   this slide 1:10   |   clock at end 2:48</a:t>
             </a:r>
           </a:p>
           <a:p>
@@ -1422,7 +1422,7 @@
           <a:lstStyle/>
           <a:p>
             <a:r>
-              <a:t>RAHUL   |   this slide 0:51   |   clock at end 3:38</a:t>
+              <a:t>RAHUL   |   this slide 0:51   |   clock at end 3:40</a:t>
             </a:r>
           </a:p>
           <a:p>
@@ -1604,7 +1604,7 @@
           <a:lstStyle/>
           <a:p>
             <a:r>
-              <a:t>RAUNAK   |   this slide 1:31   |   clock at end 5:10</a:t>
+              <a:t>RAUNAK   |   this slide 1:31   |   clock at end 5:12</a:t>
             </a:r>
           </a:p>
           <a:p>
@@ -1818,7 +1818,7 @@
           <a:lstStyle/>
           <a:p>
             <a:r>
-              <a:t>RAUNAK   |   this slide 1:22   |   clock at end 6:32</a:t>
+              <a:t>RAUNAK   |   this slide 1:22   |   clock at end 6:34</a:t>
             </a:r>
           </a:p>
           <a:p>
@@ -2027,7 +2027,7 @@
           <a:lstStyle/>
           <a:p>
             <a:r>
-              <a:t>RAUNAK   |   this slide 1:48   |   clock at end 8:21</a:t>
+              <a:t>RAUNAK   |   this slide 1:48   |   clock at end 8:23</a:t>
             </a:r>
           </a:p>
           <a:p>
@@ -2297,7 +2297,7 @@
           <a:lstStyle/>
           <a:p>
             <a:r>
-              <a:t>RAUNAK   |   this slide 1:31   |   clock at end 9:53</a:t>
+              <a:t>RAUNAK   |   this slide 1:31   |   clock at end 9:54</a:t>
             </a:r>
           </a:p>
           <a:p>
@@ -6810,8 +6810,8 @@
         </p:blipFill>
         <p:spPr>
           <a:xfrm>
-            <a:off x="1999047" y="1874519"/>
-            <a:ext cx="8193600" cy="3822192"/>
+            <a:off x="1920906" y="1874519"/>
+            <a:ext cx="8349882" cy="3822192"/>
           </a:xfrm>
           <a:prstGeom prst="rect">
             <a:avLst/>
@@ -6852,7 +6852,7 @@
                 </a:solidFill>
                 <a:latin typeface="Avenir Next"/>
               </a:rPr>
-              <a:t>Fig. 1   Copper. Investigation ordered in February, duty announced in July, in force from August.</a:t>
+              <a:t>Fig. 1   Copper imports. Announced July 2025, in force from August.</a:t>
             </a:r>
           </a:p>
           <a:p>
@@ -6868,7 +6868,7 @@
                 </a:solidFill>
                 <a:latin typeface="Avenir Next"/>
               </a:rPr>
-              <a:t>The climb starts at the investigation, not at the announcement.</a:t>
+              <a:t>Imports had been climbing since February, because the duty was expected.</a:t>
             </a:r>
           </a:p>
           <a:p>

--- a/slides/Mandadi_Khalsa_Presentation1.pptx
+++ b/slides/Mandadi_Khalsa_Presentation1.pptx
@@ -1052,7 +1052,7 @@
           <a:p/>
           <a:p>
             <a:r>
-              <a:t>You'll also see it climb back up at the end. That's one product and one tariff, so we're not</a:t>
+              <a:t>You'll also see it climb back up at the end. That's one metal and one tariff, so we're not</a:t>
             </a:r>
           </a:p>
           <a:p>

--- a/slides/Mandadi_Khalsa_Presentation1.pptx
+++ b/slides/Mandadi_Khalsa_Presentation1.pptx
@@ -986,7 +986,7 @@
           <a:lstStyle/>
           <a:p>
             <a:r>
-              <a:t>RAHUL   |   this slide 1:18   |   clock at end 1:38</a:t>
+              <a:t>RAHUL   |   this slide 1:31   |   clock at end 1:51</a:t>
             </a:r>
           </a:p>
           <a:p>
@@ -1018,7 +1018,7 @@
           </a:p>
           <a:p>
             <a:r>
-              <a:t>announced. Here's August, when it started. Three weeks apart.</a:t>
+              <a:t>announced. Here's August, when it started.</a:t>
             </a:r>
           </a:p>
           <a:p/>
@@ -1052,28 +1052,33 @@
           <a:p/>
           <a:p>
             <a:r>
-              <a:t>You'll also see it climb back up at the end. That's one metal and one tariff, so we're not</a:t>
-            </a:r>
-          </a:p>
-          <a:p>
-            <a:r>
-              <a:t>reading anything into it. The measuring comes later.</a:t>
-            </a:r>
-          </a:p>
-          <a:p/>
-          <a:p>
-            <a:r>
-              <a:t>That's front-loading. Goods that would have come in October came in June instead. Nothing got</a:t>
-            </a:r>
-          </a:p>
-          <a:p>
-            <a:r>
-              <a:t>created, it just moved forward in time. We call that borrowed, because the later months pay it</a:t>
-            </a:r>
-          </a:p>
-          <a:p>
-            <a:r>
-              <a:t>back.</a:t>
+              <a:t>You'll also see it climb back up at the end, and here's why. When the tariff actually landed it</a:t>
+            </a:r>
+          </a:p>
+          <a:p>
+            <a:r>
+              <a:t>covered semi-finished copper, so wire and tube and fittings, not refined cathodes, which are most</a:t>
+            </a:r>
+          </a:p>
+          <a:p>
+            <a:r>
+              <a:t>of this chart. So a lot of that rush was on an expectation that didn't land. The products that did</a:t>
+            </a:r>
+          </a:p>
+          <a:p>
+            <a:r>
+              <a:t>get the fifty percent are down about forty-five percent and have stayed down.</a:t>
+            </a:r>
+          </a:p>
+          <a:p/>
+          <a:p>
+            <a:r>
+              <a:t>That's front-loading. Goods that would have come in October came in June instead. We call that</a:t>
+            </a:r>
+          </a:p>
+          <a:p>
+            <a:r>
+              <a:t>borrowed, because the later months pay it back.</a:t>
             </a:r>
           </a:p>
           <a:p/>
@@ -1218,7 +1223,7 @@
           <a:lstStyle/>
           <a:p>
             <a:r>
-              <a:t>RAHUL   |   this slide 1:10   |   clock at end 2:48</a:t>
+              <a:t>RAHUL   |   this slide 1:08   |   clock at end 3:00</a:t>
             </a:r>
           </a:p>
           <a:p>
@@ -1267,12 +1272,12 @@
           <a:p/>
           <a:p>
             <a:r>
-              <a:t>And it isn't just importers. A bank that lent against that trade is asking the same question. So</a:t>
-            </a:r>
-          </a:p>
-          <a:p>
-            <a:r>
-              <a:t>is the carrier running that route.</a:t>
+              <a:t>And it isn't just importers. A bank that lent against that trade, or the carrier running it, faces</a:t>
+            </a:r>
+          </a:p>
+          <a:p>
+            <a:r>
+              <a:t>the same question.</a:t>
             </a:r>
           </a:p>
           <a:p/>
@@ -1422,7 +1427,7 @@
           <a:lstStyle/>
           <a:p>
             <a:r>
-              <a:t>RAHUL   |   this slide 0:51   |   clock at end 3:40</a:t>
+              <a:t>RAHUL   |   this slide 0:51   |   clock at end 3:51</a:t>
             </a:r>
           </a:p>
           <a:p>
@@ -1604,7 +1609,7 @@
           <a:lstStyle/>
           <a:p>
             <a:r>
-              <a:t>RAUNAK   |   this slide 1:31   |   clock at end 5:12</a:t>
+              <a:t>RAUNAK   |   this slide 1:31   |   clock at end 5:23</a:t>
             </a:r>
           </a:p>
           <a:p>
@@ -1818,7 +1823,7 @@
           <a:lstStyle/>
           <a:p>
             <a:r>
-              <a:t>RAUNAK   |   this slide 1:22   |   clock at end 6:34</a:t>
+              <a:t>RAUNAK   |   this slide 1:22   |   clock at end 6:45</a:t>
             </a:r>
           </a:p>
           <a:p>
@@ -1867,7 +1872,7 @@
           <a:p/>
           <a:p>
             <a:r>
-              <a:t>Some look like tariff stories. Organic chemicals and pharmaceuticals were both under open tariff</a:t>
+              <a:t>Some look like tariff stories, like organic chemicals and pharmaceuticals, both under tariff</a:t>
             </a:r>
           </a:p>
           <a:p>
@@ -2027,7 +2032,7 @@
           <a:lstStyle/>
           <a:p>
             <a:r>
-              <a:t>RAUNAK   |   this slide 1:48   |   clock at end 8:23</a:t>
+              <a:t>RAUNAK   |   this slide 1:46   |   clock at end 8:31</a:t>
             </a:r>
           </a:p>
           <a:p>
@@ -2114,12 +2119,7 @@
           <a:p/>
           <a:p>
             <a:r>
-              <a:t>It was one of three reasons, and it's the one that isn't just our problem. Anyone doing this</a:t>
-            </a:r>
-          </a:p>
-          <a:p>
-            <a:r>
-              <a:t>would hit it.</a:t>
+              <a:t>It was one of three reasons, and it's the one anyone doing this would hit.</a:t>
             </a:r>
           </a:p>
           <a:p/>
@@ -2297,7 +2297,7 @@
           <a:lstStyle/>
           <a:p>
             <a:r>
-              <a:t>RAUNAK   |   this slide 1:31   |   clock at end 9:54</a:t>
+              <a:t>RAUNAK   |   this slide 1:31   |   clock at end 10:03</a:t>
             </a:r>
           </a:p>
           <a:p>

--- a/slides/Mandadi_Khalsa_Presentation1.pptx
+++ b/slides/Mandadi_Khalsa_Presentation1.pptx
@@ -986,7 +986,7 @@
           <a:lstStyle/>
           <a:p>
             <a:r>
-              <a:t>RAHUL   |   this slide 1:31   |   clock at end 1:51</a:t>
+              <a:t>RAHUL   |   this slide 1:22   |   clock at end 1:42</a:t>
             </a:r>
           </a:p>
           <a:p>
@@ -1024,17 +1024,17 @@
           <a:p/>
           <a:p>
             <a:r>
-              <a:t>But look at what the line does. It doesn't wait for July. It starts climbing in February, and</a:t>
-            </a:r>
-          </a:p>
-          <a:p>
-            <a:r>
-              <a:t>nearly triples by the time of the announcement. Why? Because the investigation behind that tariff</a:t>
-            </a:r>
-          </a:p>
-          <a:p>
-            <a:r>
-              <a:t>was public months earlier. Everyone in the industry could see it coming.</a:t>
+              <a:t>But look at what the line does. It doesn't wait for July. It starts climbing in February and</a:t>
+            </a:r>
+          </a:p>
+          <a:p>
+            <a:r>
+              <a:t>nearly triples by the announcement, because the investigation was public months earlier. Everyone</a:t>
+            </a:r>
+          </a:p>
+          <a:p>
+            <a:r>
+              <a:t>could see it coming.</a:t>
             </a:r>
           </a:p>
           <a:p/>
@@ -1052,22 +1052,22 @@
           <a:p/>
           <a:p>
             <a:r>
-              <a:t>You'll also see it climb back up at the end, and here's why. When the tariff actually landed it</a:t>
-            </a:r>
-          </a:p>
-          <a:p>
-            <a:r>
-              <a:t>covered semi-finished copper, so wire and tube and fittings, not refined cathodes, which are most</a:t>
-            </a:r>
-          </a:p>
-          <a:p>
-            <a:r>
-              <a:t>of this chart. So a lot of that rush was on an expectation that didn't land. The products that did</a:t>
-            </a:r>
-          </a:p>
-          <a:p>
-            <a:r>
-              <a:t>get the fifty percent are down about forty-five percent and have stayed down.</a:t>
+              <a:t>You'll also see it climb back up, and here's why. The tariff landed on semi-finished copper, wire</a:t>
+            </a:r>
+          </a:p>
+          <a:p>
+            <a:r>
+              <a:t>and tube, not on refined cathodes, which are most of this chart. So a lot of that rush was on an</a:t>
+            </a:r>
+          </a:p>
+          <a:p>
+            <a:r>
+              <a:t>expectation that didn't land. The products that did get the fifty percent are down forty-five</a:t>
+            </a:r>
+          </a:p>
+          <a:p>
+            <a:r>
+              <a:t>percent and have stayed down.</a:t>
             </a:r>
           </a:p>
           <a:p/>
@@ -1223,7 +1223,7 @@
           <a:lstStyle/>
           <a:p>
             <a:r>
-              <a:t>RAHUL   |   this slide 1:08   |   clock at end 3:00</a:t>
+              <a:t>RAHUL   |   this slide 1:08   |   clock at end 2:51</a:t>
             </a:r>
           </a:p>
           <a:p>
@@ -1427,7 +1427,7 @@
           <a:lstStyle/>
           <a:p>
             <a:r>
-              <a:t>RAHUL   |   this slide 0:51   |   clock at end 3:51</a:t>
+              <a:t>RAHUL   |   this slide 0:51   |   clock at end 3:42</a:t>
             </a:r>
           </a:p>
           <a:p>
@@ -1609,7 +1609,7 @@
           <a:lstStyle/>
           <a:p>
             <a:r>
-              <a:t>RAUNAK   |   this slide 1:31   |   clock at end 5:23</a:t>
+              <a:t>RAUNAK   |   this slide 1:28   |   clock at end 5:11</a:t>
             </a:r>
           </a:p>
           <a:p>
@@ -1690,12 +1690,12 @@
           <a:p/>
           <a:p>
             <a:r>
-              <a:t>Second source is the Federal Register. We went through nearly two thousand eight hundred</a:t>
-            </a:r>
-          </a:p>
-          <a:p>
-            <a:r>
-              <a:t>documents, and a hundred and thirty four of them are real tariff actions.</a:t>
+              <a:t>Second source is the Federal Register. Nearly two thousand eight hundred documents, a hundred and</a:t>
+            </a:r>
+          </a:p>
+          <a:p>
+            <a:r>
+              <a:t>thirty four real tariff actions.</a:t>
             </a:r>
           </a:p>
           <a:p/>
@@ -1823,7 +1823,7 @@
           <a:lstStyle/>
           <a:p>
             <a:r>
-              <a:t>RAUNAK   |   this slide 1:22   |   clock at end 6:45</a:t>
+              <a:t>RAUNAK   |   this slide 1:22   |   clock at end 6:33</a:t>
             </a:r>
           </a:p>
           <a:p>
@@ -2032,7 +2032,7 @@
           <a:lstStyle/>
           <a:p>
             <a:r>
-              <a:t>RAUNAK   |   this slide 1:46   |   clock at end 8:31</a:t>
+              <a:t>RAUNAK   |   this slide 1:46   |   clock at end 8:19</a:t>
             </a:r>
           </a:p>
           <a:p>
@@ -2297,7 +2297,7 @@
           <a:lstStyle/>
           <a:p>
             <a:r>
-              <a:t>RAUNAK   |   this slide 1:31   |   clock at end 10:03</a:t>
+              <a:t>RAUNAK   |   this slide 1:30   |   clock at end 9:50</a:t>
             </a:r>
           </a:p>
           <a:p>
@@ -2373,7 +2373,7 @@
           <a:p/>
           <a:p>
             <a:r>
-              <a:t>Next, question one first, then two and three for the final report.</a:t>
+              <a:t>Next, question one, then two and three for the final report.</a:t>
             </a:r>
           </a:p>
           <a:p/>
